--- a/plans/ppt/TW-SELFSELECT台股買賣自動化系統-W7-講稿版.pptx
+++ b/plans/ppt/TW-SELFSELECT台股買賣自動化系統-W7-講稿版.pptx
@@ -1346,8 +1346,14 @@
           </a:p>
           <a:p>
             <a:r>
+              <a:rPr sz="1200"/>
+              <a:t>另外要說清楚這門課的節奏：從 2026-10-30 起才開始真正的實測與持續改進，所以講義上的數字是「當天版本」，之後每一次程式修改都會升版號並更新到 Git 專案。要看最新版、最新回測與最新的改進清單，一律以 Git 專案為準。</a:t>
+            </a:r>
+          </a:p>
+          <a:p>
+            <a:r>
               <a:rPr sz="1200" b="1"/>
-              <a:t>【講師提示】最後留 30 秒問答；把 README 的「改進空間」與 cairn/LOG 指給學員當延伸閱讀。</a:t>
+              <a:t>【講師提示】最後留 30 秒問答；把 Git 專案網址、README 的「改進空間」與 cairn/LOG 一起指給學員當延伸閱讀。</a:t>
             </a:r>
           </a:p>
         </p:txBody>
@@ -1435,8 +1441,14 @@
           </a:p>
           <a:p>
             <a:r>
+              <a:rPr sz="1200"/>
+              <a:t>最後那句總結請大家記住：換了評分、多了 AI 選項，但兩者都還沒站穩。從 2026-10-30 起我們才開始真正的實測，之後會持續改進；所有最新數字、參數與更新都在 Git 專案上，講義拿到的是當天版本。</a:t>
+            </a:r>
+          </a:p>
+          <a:p>
+            <a:r>
               <a:rPr sz="1200" b="1"/>
-              <a:t>【講師提示】四個問題寫在學員手冊當複習提綱，講完每一段可以回頭指一次。</a:t>
+              <a:t>【講師提示】課程結束後把 Git 專案網址留給學員；提醒他們數字會更新，回測結論以 repo 內文件為準。</a:t>
             </a:r>
           </a:p>
         </p:txBody>
@@ -17737,8 +17749,8 @@
         </p:nvSpPr>
         <p:spPr>
           <a:xfrm>
-            <a:off x="822960" y="1481328"/>
-            <a:ext cx="10515600" cy="2926080"/>
+            <a:off x="822960" y="1389888"/>
+            <a:ext cx="10515600" cy="3566160"/>
           </a:xfrm>
           <a:prstGeom prst="rect">
             <a:avLst/>
@@ -17753,11 +17765,11 @@
           <a:p>
             <a:pPr>
               <a:spcAft>
-                <a:spcPts val="1200"/>
+                <a:spcPts val="1100"/>
               </a:spcAft>
             </a:pPr>
             <a:r>
-              <a:rPr sz="1900" b="0">
+              <a:rPr sz="1800" b="0">
                 <a:solidFill>
                   <a:srgbClr val="1F242B"/>
                 </a:solidFill>
@@ -17768,11 +17780,11 @@
           <a:p>
             <a:pPr>
               <a:spcAft>
-                <a:spcPts val="1200"/>
+                <a:spcPts val="1100"/>
               </a:spcAft>
             </a:pPr>
             <a:r>
-              <a:rPr sz="1900" b="0">
+              <a:rPr sz="1800" b="0">
                 <a:solidFill>
                   <a:srgbClr val="1F242B"/>
                 </a:solidFill>
@@ -17783,11 +17795,11 @@
           <a:p>
             <a:pPr>
               <a:spcAft>
-                <a:spcPts val="1200"/>
+                <a:spcPts val="1100"/>
               </a:spcAft>
             </a:pPr>
             <a:r>
-              <a:rPr sz="1900" b="1">
+              <a:rPr sz="1800" b="1">
                 <a:solidFill>
                   <a:srgbClr val="C0392B"/>
                 </a:solidFill>
@@ -17798,16 +17810,31 @@
           <a:p>
             <a:pPr>
               <a:spcAft>
-                <a:spcPts val="1200"/>
+                <a:spcPts val="1100"/>
               </a:spcAft>
             </a:pPr>
             <a:r>
-              <a:rPr sz="1900" b="0">
+              <a:rPr sz="1800" b="0">
                 <a:solidFill>
                   <a:srgbClr val="1F242B"/>
                 </a:solidFill>
               </a:rPr>
               <a:t>• 作業：挑一個改進項目做 A/B（例：產業上限接進實盤），下次報告數字與口徑</a:t>
+            </a:r>
+          </a:p>
+          <a:p>
+            <a:pPr>
+              <a:spcAft>
+                <a:spcPts val="1100"/>
+              </a:spcAft>
+            </a:pPr>
+            <a:r>
+              <a:rPr sz="1800" b="0">
+                <a:solidFill>
+                  <a:srgbClr val="1F242B"/>
+                </a:solidFill>
+              </a:rPr>
+              <a:t>📌 自 2026-10-30 起開始實測、持續改進；最新更新請上 Git 專案：github.com/dinchentech/tw-selfselect</a:t>
             </a:r>
           </a:p>
         </p:txBody>
@@ -17902,8 +17929,8 @@
         </p:nvSpPr>
         <p:spPr>
           <a:xfrm>
-            <a:off x="822960" y="1344168"/>
-            <a:ext cx="10515600" cy="3291840"/>
+            <a:off x="822960" y="1298448"/>
+            <a:ext cx="10515600" cy="3749039"/>
           </a:xfrm>
           <a:prstGeom prst="rect">
             <a:avLst/>
@@ -17918,76 +17945,91 @@
           <a:p>
             <a:pPr>
               <a:spcAft>
-                <a:spcPts val="1000"/>
+                <a:spcPts val="900"/>
               </a:spcAft>
             </a:pPr>
             <a:r>
-              <a:rPr sz="1900" b="0">
+              <a:rPr sz="1800" b="0">
                 <a:solidFill>
                   <a:srgbClr val="1F242B"/>
                 </a:solidFill>
               </a:rPr>
-              <a:t>• 1. zscore（預設）＋ AI 選股 是什麼？回測結果如何？</a:t>
+              <a:t>1. zscore（預設）＋ AI 選股 是什麼？回測結果如何？</a:t>
             </a:r>
           </a:p>
           <a:p>
             <a:pPr>
               <a:spcAft>
-                <a:spcPts val="1000"/>
+                <a:spcPts val="900"/>
               </a:spcAft>
             </a:pPr>
             <a:r>
-              <a:rPr sz="1900" b="0">
+              <a:rPr sz="1800" b="0">
                 <a:solidFill>
                   <a:srgbClr val="1F242B"/>
                 </a:solidFill>
               </a:rPr>
-              <a:t>• 2. zscore 有哪些重要參數？哪些該調、哪些不要碰？</a:t>
+              <a:t>2. zscore 有哪些重要參數？哪些該調、哪些不要碰？</a:t>
             </a:r>
           </a:p>
           <a:p>
             <a:pPr>
               <a:spcAft>
-                <a:spcPts val="1000"/>
+                <a:spcPts val="900"/>
               </a:spcAft>
             </a:pPr>
             <a:r>
-              <a:rPr sz="1900" b="0">
+              <a:rPr sz="1800" b="0">
                 <a:solidFill>
                   <a:srgbClr val="1F242B"/>
                 </a:solidFill>
               </a:rPr>
-              <a:t>• 3. AI 選股怎麼用？D1 手動、逾期自動 fallback 的流程</a:t>
+              <a:t>3. AI 選股怎麼用？D1 手動、逾期自動 fallback 的流程</a:t>
             </a:r>
           </a:p>
           <a:p>
             <a:pPr>
               <a:spcAft>
-                <a:spcPts val="1000"/>
+                <a:spcPts val="900"/>
               </a:spcAft>
             </a:pPr>
             <a:r>
-              <a:rPr sz="1900" b="0">
+              <a:rPr sz="1800" b="0">
                 <a:solidFill>
                   <a:srgbClr val="1F242B"/>
                 </a:solidFill>
               </a:rPr>
-              <a:t>• 4. 可能的改進方式：哪幾個缺口最該先補</a:t>
+              <a:t>4. 可能的改進方式：哪幾個缺口最該先補</a:t>
             </a:r>
           </a:p>
           <a:p>
             <a:pPr>
               <a:spcAft>
-                <a:spcPts val="1000"/>
+                <a:spcPts val="900"/>
               </a:spcAft>
             </a:pPr>
             <a:r>
-              <a:rPr sz="1900" b="1">
+              <a:rPr sz="1800" b="1">
                 <a:solidFill>
                   <a:srgbClr val="C0392B"/>
                 </a:solidFill>
               </a:rPr>
               <a:t>• 一句話總結：預設從 legacy 換成 zscore，並多了「AI 當選股員」這個選項；但兩者都還沒站穩</a:t>
+            </a:r>
+          </a:p>
+          <a:p>
+            <a:pPr>
+              <a:spcAft>
+                <a:spcPts val="900"/>
+              </a:spcAft>
+            </a:pPr>
+            <a:r>
+              <a:rPr sz="1800" b="0">
+                <a:solidFill>
+                  <a:srgbClr val="1F242B"/>
+                </a:solidFill>
+              </a:rPr>
+              <a:t>• 自 2026-10-30 起開始實測、持續改進；最新更新請上 Git 專案：github.com/dinchentech/tw-selfselect</a:t>
             </a:r>
           </a:p>
         </p:txBody>

--- a/plans/ppt/TW-SELFSELECT台股買賣自動化系統-W7-講稿版.pptx
+++ b/plans/ppt/TW-SELFSELECT台股買賣自動化系統-W7-講稿版.pptx
@@ -938,6 +938,12 @@
             <a:r>
               <a:rPr sz="1200" b="1"/>
               <a:t>⏱ 建議時間：3 分鐘</a:t>
+            </a:r>
+          </a:p>
+          <a:p>
+            <a:r>
+              <a:rPr sz="1200"/>
+              <a:t>先定義名詞，不然後面會聽不懂。**D1＝每個月的「選股第一日」，也就是該月第 1 個交易日**；盤後 13:36 起系統會跑選股、改寫 .env 的持股名單。**D2＝第 2 個交易日**，13:25–13:30 依訊號換股進場。所以 D1 是「決定買什麼」的那天，D2 是「真的買」的那天。</a:t>
             </a:r>
           </a:p>
           <a:p>
@@ -16077,6 +16083,100 @@
           </a:graphicData>
         </a:graphic>
       </p:graphicFrame>
+      <p:sp>
+        <p:nvSpPr>
+          <p:cNvPr id="5" name="TextBox 4"/>
+          <p:cNvSpPr txBox="1"/>
+          <p:nvPr/>
+        </p:nvSpPr>
+        <p:spPr>
+          <a:xfrm>
+            <a:off x="685800" y="3703320"/>
+            <a:ext cx="10835640" cy="1051560"/>
+          </a:xfrm>
+          <a:prstGeom prst="rect">
+            <a:avLst/>
+          </a:prstGeom>
+          <a:solidFill>
+            <a:srgbClr val="FFF4E5"/>
+          </a:solidFill>
+          <a:ln>
+            <a:solidFill>
+              <a:srgbClr val="F0B48A"/>
+            </a:solidFill>
+          </a:ln>
+        </p:spPr>
+        <p:txBody>
+          <a:bodyPr wrap="square">
+            <a:spAutoFit/>
+          </a:bodyPr>
+          <a:lstStyle/>
+          <a:p>
+            <a:r>
+              <a:rPr sz="1400">
+                <a:solidFill>
+                  <a:srgbClr val="1F242B"/>
+                </a:solidFill>
+              </a:rPr>
+              <a:t>D1 ＝ 每月選股第一日（該月第 1 個交易日）：盤後 13:36 起選股、改寫 .env 的持股名單；AI 模式的期限是 13:50。
+D2 ＝ 第 2 個交易日：13:25–13:30 依訊號換股進場。⇒ D1 決定「買什麼」，D2 才真的「買」。</a:t>
+            </a:r>
+          </a:p>
+        </p:txBody>
+      </p:sp>
+      <p:sp>
+        <p:nvSpPr>
+          <p:cNvPr id="6" name="TextBox 5"/>
+          <p:cNvSpPr txBox="1"/>
+          <p:nvPr/>
+        </p:nvSpPr>
+        <p:spPr>
+          <a:xfrm>
+            <a:off x="685800" y="4892040"/>
+            <a:ext cx="10835640" cy="1097280"/>
+          </a:xfrm>
+          <a:prstGeom prst="rect">
+            <a:avLst/>
+          </a:prstGeom>
+          <a:noFill/>
+        </p:spPr>
+        <p:txBody>
+          <a:bodyPr wrap="square">
+            <a:spAutoFit/>
+          </a:bodyPr>
+          <a:lstStyle/>
+          <a:p>
+            <a:pPr>
+              <a:spcAft>
+                <a:spcPts val="600"/>
+              </a:spcAft>
+            </a:pPr>
+            <a:r>
+              <a:rPr sz="1300" b="0">
+                <a:solidFill>
+                  <a:srgbClr val="1F242B"/>
+                </a:solidFill>
+              </a:rPr>
+              <a:t>• D1 沒完成也不會卡住：期限一過，系統自動用規則選股；已套用的 AI 名單不會被覆蓋</a:t>
+            </a:r>
+          </a:p>
+          <a:p>
+            <a:pPr>
+              <a:spcAft>
+                <a:spcPts val="600"/>
+              </a:spcAft>
+            </a:pPr>
+            <a:r>
+              <a:rPr sz="1300" b="0">
+                <a:solidFill>
+                  <a:srgbClr val="1F242B"/>
+                </a:solidFill>
+              </a:rPr>
+              <a:t>• 名單沿用到下一個 D1：中間每天只依策略訊號進出，不會因為盤中波動改選股</a:t>
+            </a:r>
+          </a:p>
+        </p:txBody>
+      </p:sp>
     </p:spTree>
   </p:cSld>
   <p:clrMapOvr>

--- a/plans/ppt/TW-SELFSELECT台股買賣自動化系統-W7-講稿版.pptx
+++ b/plans/ppt/TW-SELFSELECT台股買賣自動化系統-W7-講稿版.pptx
@@ -943,7 +943,7 @@
           <a:p>
             <a:r>
               <a:rPr sz="1200"/>
-              <a:t>先定義名詞，不然後面會聽不懂。**D1＝每個月的「選股第一日」，也就是該月第 1 個交易日**；盤後 13:36 起系統會跑選股、改寫 .env 的持股名單。**D2＝第 2 個交易日**，13:25–13:30 依訊號換股進場。所以 D1 是「決定買什麼」的那天，D2 是「真的買」的那天。</a:t>
+              <a:t>先定義名詞，不然後面會聽不懂。D1＝每個月的「選股第一日」，也就是該月第 1 個交易日；盤後 13:36 起系統會跑選股、改寫 .env 的持股名單。D2＝第 2 個交易日，13:25–13:30 依訊號換股進場。所以 D1 是「決定買什麼」的那天，D2 是「真的買」的那天。</a:t>
             </a:r>
           </a:p>
           <a:p>
@@ -15381,7 +15381,7 @@
                             <a:srgbClr val="1F242B"/>
                           </a:solidFill>
                         </a:rPr>
-                        <a:t>as_of ＝ 引擎 sel_date（當月第一個交易日的**前一個**交易日收盤）</a:t>
+                        <a:t>as_of ＝ 引擎 sel_date（當月第一個交易日的「前一個」交易日收盤）</a:t>
                       </a:r>
                     </a:p>
                   </a:txBody>

--- a/plans/ppt/TW-SELFSELECT台股買賣自動化系統-W7-講稿版.pptx
+++ b/plans/ppt/TW-SELFSELECT台股買賣自動化系統-W7-講稿版.pptx
@@ -27,6 +27,7 @@
     <p:sldId id="271" r:id="rId21"/>
     <p:sldId id="272" r:id="rId22"/>
     <p:sldId id="273" r:id="rId23"/>
+    <p:sldId id="274" r:id="rId24"/>
   </p:sldIdLst>
   <p:sldSz cx="12188825" cy="6858000"/>
   <p:notesSz cx="6858000" cy="9144000"/>
@@ -1151,7 +1152,7 @@
           <a:p>
             <a:r>
               <a:rPr sz="1200"/>
-              <a:t>第二，實盤與回測吃同一組因子：我們已經把 preset 做進實盤，但實盤還沒有產業上限的實測驗證。第三，資料：上櫃下市股沒納入、法人只有 41 個交易日、新聞預設關閉、成本沒算滑價。</a:t>
+              <a:t>第二，產業上限：程式已經接進實盤（變數 SELFSELECT_MAX_PER_SECTOR，preset aggressive 會開），但預設是關的，而且回測有效的是「池 150」情境，實盤現在跑池 100，這格還沒實測過，預設值也還沒定。第三，資料：上櫃下市股沒納入、法人只有 41 個交易日、新聞預設關閉、成本沒算滑價。</a:t>
             </a:r>
           </a:p>
           <a:p>
@@ -1384,6 +1385,107 @@
 </p:notes>
 </file>
 
+<file path=ppt/notesSlides/notesSlide19.xml><?xml version="1.0" encoding="utf-8"?>
+<p:notes xmlns:a="http://schemas.openxmlformats.org/drawingml/2006/main" xmlns:p="http://schemas.openxmlformats.org/presentationml/2006/main" xmlns:r="http://schemas.openxmlformats.org/officeDocument/2006/relationships">
+  <p:cSld>
+    <p:spTree>
+      <p:nvGrpSpPr>
+        <p:cNvPr id="1" name=""/>
+        <p:cNvGrpSpPr/>
+        <p:nvPr/>
+      </p:nvGrpSpPr>
+      <p:grpSpPr>
+        <a:xfrm>
+          <a:off x="0" y="0"/>
+          <a:ext cx="0" cy="0"/>
+          <a:chOff x="0" y="0"/>
+          <a:chExt cx="0" cy="0"/>
+        </a:xfrm>
+      </p:grpSpPr>
+      <p:sp>
+        <p:nvSpPr>
+          <p:cNvPr id="2" name="Slide Image Placeholder 1"/>
+          <p:cNvSpPr>
+            <a:spLocks noGrp="1"/>
+          </p:cNvSpPr>
+          <p:nvPr>
+            <p:ph type="sldImg"/>
+          </p:nvPr>
+        </p:nvSpPr>
+        <p:spPr/>
+      </p:sp>
+      <p:sp>
+        <p:nvSpPr>
+          <p:cNvPr id="3" name="Notes Placeholder 2"/>
+          <p:cNvSpPr>
+            <a:spLocks noGrp="1"/>
+          </p:cNvSpPr>
+          <p:nvPr>
+            <p:ph type="body"/>
+          </p:nvPr>
+        </p:nvSpPr>
+        <p:spPr/>
+        <p:txBody>
+          <a:bodyPr/>
+          <a:lstStyle/>
+          <a:p>
+            <a:r>
+              <a:rPr sz="1200" b="1"/>
+              <a:t>⏱ 建議時間：3 分鐘</a:t>
+            </a:r>
+          </a:p>
+          <a:p>
+            <a:r>
+              <a:rPr sz="1200"/>
+              <a:t>這頁是整集的收尾提醒，也是最重要的一頁。</a:t>
+            </a:r>
+          </a:p>
+          <a:p>
+            <a:r>
+              <a:rPr sz="1200"/>
+              <a:t>同樣的策略骨架、同樣的成本假設，v1.0 換到 v1.1 唯一的差別就是「選股變強了」——評分從 legacy 換成 zscore，池子放大、再加上營收因子。結果是總報酬從 +207.9% 變成 +762.4%，將近 3.7 倍。這就是「選股很重要」。</a:t>
+            </a:r>
+          </a:p>
+          <a:p>
+            <a:r>
+              <a:rPr sz="1200"/>
+              <a:t>但同一張表右邊兩欄請一起看：最大回撤從 −36.0% 變成 −53.7%，深了將近 18 個百分點；夏普只從 0.69 升到 0.95，還是輸給 0050 的 1.06。換句話說，你拿到的不是「更穩的報酬」，而是「更刺激的報酬」。</a:t>
+            </a:r>
+          </a:p>
+          <a:p>
+            <a:r>
+              <a:rPr sz="1200"/>
+              <a:t>所以最後這句要講清楚：風險與獲利之間怎麼取捨，是使用者自己的決定，不是策略作者能替你決定的。保守的人留在 current（+411.1%、回撤 −52.4%），想追報酬的切 revenue 或 aggressive，但請先想清楚「−53.7% 的時候你抱不抱得住」。</a:t>
+            </a:r>
+          </a:p>
+          <a:p>
+            <a:r>
+              <a:rPr sz="1200" b="1"/>
+              <a:t>【講師提示】這一頁請放慢速度；可以現場問一句「如果你的帳戶從 100 萬掉到 46 萬，你會不會手動砍掉？」，讓學員自己回答。</a:t>
+            </a:r>
+          </a:p>
+        </p:txBody>
+      </p:sp>
+      <p:sp>
+        <p:nvSpPr>
+          <p:cNvPr id="4" name="Slide Number Placeholder 3"/>
+          <p:cNvSpPr>
+            <a:spLocks noGrp="1"/>
+          </p:cNvSpPr>
+          <p:nvPr>
+            <p:ph type="sldNum" idx="24"/>
+          </p:nvPr>
+        </p:nvSpPr>
+        <p:spPr/>
+      </p:sp>
+    </p:spTree>
+  </p:cSld>
+  <p:clrMapOvr>
+    <a:masterClrMapping/>
+  </p:clrMapOvr>
+</p:notes>
+</file>
+
 <file path=ppt/notesSlides/notesSlide2.xml><?xml version="1.0" encoding="utf-8"?>
 <p:notes xmlns:a="http://schemas.openxmlformats.org/drawingml/2006/main" xmlns:p="http://schemas.openxmlformats.org/presentationml/2006/main" xmlns:r="http://schemas.openxmlformats.org/officeDocument/2006/relationships">
   <p:cSld>
@@ -1924,6 +2026,12 @@
             <a:r>
               <a:rPr sz="1200"/>
               <a:t>右邊那條紅線是提醒：比較參數之前，先把資料補滿並記下快照，不然你會把「資料補齊」誤讀成「策略變好」。</a:t>
+            </a:r>
+          </a:p>
+          <a:p>
+            <a:r>
+              <a:rPr sz="1200"/>
+              <a:t>最下面這張是實例，直接看名單差別：2024-11-29 那天，產業上限關掉時前五名有四檔是航運（2618、2603、2610、2609）——那不叫分散五檔，那叫押一個產業。把上限設成 2 檔之後，航運只留 2 檔，補進 2059、3533，產業變成 1／2／2。</a:t>
             </a:r>
           </a:p>
           <a:p>
@@ -16947,7 +17055,7 @@
                             <a:srgbClr val="1F242B"/>
                           </a:solidFill>
                         </a:rPr>
-                        <a:t>實盤與回測因子不對齊</a:t>
+                        <a:t>產業上限尚未定調</a:t>
                       </a:r>
                     </a:p>
                   </a:txBody>
@@ -16969,7 +17077,7 @@
                             <a:srgbClr val="1F242B"/>
                           </a:solidFill>
                         </a:rPr>
-                        <a:t>把產業上限接進實盤並實測（MAX_PER_SECTOR）</a:t>
+                        <a:t>已接進實盤（SELFSELECT_MAX_PER_SECTOR／preset aggressive 會開），待決定預設值＋實測驗證</a:t>
                       </a:r>
                     </a:p>
                   </a:txBody>
@@ -16991,7 +17099,7 @@
                             <a:srgbClr val="1F242B"/>
                           </a:solidFill>
                         </a:rPr>
-                        <a:t>回測口徑＝實盤口徑</a:t>
+                        <a:t>回撤可壓低（池150：−54.9%→−40.2%）</a:t>
                       </a:r>
                     </a:p>
                   </a:txBody>
@@ -17947,6 +18055,628 @@
 </p:sld>
 </file>
 
+<file path=ppt/slides/slide19.xml><?xml version="1.0" encoding="utf-8"?>
+<p:sld xmlns:a="http://schemas.openxmlformats.org/drawingml/2006/main" xmlns:p="http://schemas.openxmlformats.org/presentationml/2006/main" xmlns:r="http://schemas.openxmlformats.org/officeDocument/2006/relationships">
+  <p:cSld>
+    <p:spTree>
+      <p:nvGrpSpPr>
+        <p:cNvPr id="1" name=""/>
+        <p:cNvGrpSpPr/>
+        <p:nvPr/>
+      </p:nvGrpSpPr>
+      <p:grpSpPr/>
+      <p:sp>
+        <p:nvSpPr>
+          <p:cNvPr id="2" name="Title 1"/>
+          <p:cNvSpPr>
+            <a:spLocks noGrp="1"/>
+          </p:cNvSpPr>
+          <p:nvPr>
+            <p:ph type="title"/>
+          </p:nvPr>
+        </p:nvSpPr>
+        <p:spPr>
+          <a:xfrm>
+            <a:off x="685800" y="384048"/>
+            <a:ext cx="10835640" cy="658368"/>
+          </a:xfrm>
+        </p:spPr>
+        <p:txBody>
+          <a:bodyPr/>
+          <a:lstStyle/>
+          <a:p>
+            <a:r>
+              <a:rPr sz="2600" b="1">
+                <a:solidFill>
+                  <a:srgbClr val="1F242B"/>
+                </a:solidFill>
+              </a:rPr>
+              <a:t>最後提醒：選股很重要，但代價是風險</a:t>
+            </a:r>
+          </a:p>
+        </p:txBody>
+      </p:sp>
+      <p:sp>
+        <p:nvSpPr>
+          <p:cNvPr id="3" name="TextBox 2"/>
+          <p:cNvSpPr txBox="1"/>
+          <p:nvPr/>
+        </p:nvSpPr>
+        <p:spPr>
+          <a:xfrm>
+            <a:off x="292608" y="457200"/>
+            <a:ext cx="640080" cy="365760"/>
+          </a:xfrm>
+          <a:prstGeom prst="rect">
+            <a:avLst/>
+          </a:prstGeom>
+          <a:noFill/>
+        </p:spPr>
+        <p:txBody>
+          <a:bodyPr wrap="none">
+            <a:spAutoFit/>
+          </a:bodyPr>
+          <a:lstStyle/>
+          <a:p>
+            <a:r>
+              <a:rPr sz="1200">
+                <a:solidFill>
+                  <a:srgbClr val="5B636D"/>
+                </a:solidFill>
+              </a:rPr>
+              <a:t>19</a:t>
+            </a:r>
+          </a:p>
+        </p:txBody>
+      </p:sp>
+      <p:graphicFrame>
+        <p:nvGraphicFramePr>
+          <p:cNvPr id="4" name="Table 3"/>
+          <p:cNvGraphicFramePr>
+            <a:graphicFrameLocks noGrp="1"/>
+          </p:cNvGraphicFramePr>
+          <p:nvPr/>
+        </p:nvGraphicFramePr>
+        <p:xfrm>
+          <a:off x="685800" y="1207008"/>
+          <a:ext cx="10835638" cy="1572768"/>
+        </p:xfrm>
+        <a:graphic>
+          <a:graphicData uri="http://schemas.openxmlformats.org/drawingml/2006/table">
+            <a:tbl>
+              <a:tblPr firstRow="1" bandRow="1">
+                <a:tableStyleId>{5C22544A-7EE6-4342-B048-85BDC9FD1C3A}</a:tableStyleId>
+              </a:tblPr>
+              <a:tblGrid>
+                <a:gridCol w="5030832"/>
+                <a:gridCol w="2128429"/>
+                <a:gridCol w="2128429"/>
+                <a:gridCol w="1547948"/>
+              </a:tblGrid>
+              <a:tr h="329184">
+                <a:tc>
+                  <a:txBody>
+                    <a:bodyPr wrap="square"/>
+                    <a:lstStyle/>
+                    <a:p>
+                      <a:pPr algn="l"/>
+                      <a:r>
+                        <a:rPr sz="1300" b="1">
+                          <a:solidFill>
+                            <a:srgbClr val="FFFFFF"/>
+                          </a:solidFill>
+                        </a:rPr>
+                        <a:t>同樣的策略骨架、同樣的成本</a:t>
+                      </a:r>
+                    </a:p>
+                  </a:txBody>
+                  <a:tcPr>
+                    <a:solidFill>
+                      <a:srgbClr val="222A35"/>
+                    </a:solidFill>
+                  </a:tcPr>
+                </a:tc>
+                <a:tc>
+                  <a:txBody>
+                    <a:bodyPr wrap="square"/>
+                    <a:lstStyle/>
+                    <a:p>
+                      <a:pPr algn="ctr"/>
+                      <a:r>
+                        <a:rPr sz="1300" b="1">
+                          <a:solidFill>
+                            <a:srgbClr val="FFFFFF"/>
+                          </a:solidFill>
+                        </a:rPr>
+                        <a:t>總報酬</a:t>
+                      </a:r>
+                    </a:p>
+                  </a:txBody>
+                  <a:tcPr>
+                    <a:solidFill>
+                      <a:srgbClr val="222A35"/>
+                    </a:solidFill>
+                  </a:tcPr>
+                </a:tc>
+                <a:tc>
+                  <a:txBody>
+                    <a:bodyPr wrap="square"/>
+                    <a:lstStyle/>
+                    <a:p>
+                      <a:pPr algn="ctr"/>
+                      <a:r>
+                        <a:rPr sz="1300" b="1">
+                          <a:solidFill>
+                            <a:srgbClr val="FFFFFF"/>
+                          </a:solidFill>
+                        </a:rPr>
+                        <a:t>最大回撤</a:t>
+                      </a:r>
+                    </a:p>
+                  </a:txBody>
+                  <a:tcPr>
+                    <a:solidFill>
+                      <a:srgbClr val="222A35"/>
+                    </a:solidFill>
+                  </a:tcPr>
+                </a:tc>
+                <a:tc>
+                  <a:txBody>
+                    <a:bodyPr wrap="square"/>
+                    <a:lstStyle/>
+                    <a:p>
+                      <a:pPr algn="ctr"/>
+                      <a:r>
+                        <a:rPr sz="1300" b="1">
+                          <a:solidFill>
+                            <a:srgbClr val="FFFFFF"/>
+                          </a:solidFill>
+                        </a:rPr>
+                        <a:t>夏普</a:t>
+                      </a:r>
+                    </a:p>
+                  </a:txBody>
+                  <a:tcPr>
+                    <a:solidFill>
+                      <a:srgbClr val="222A35"/>
+                    </a:solidFill>
+                  </a:tcPr>
+                </a:tc>
+              </a:tr>
+              <a:tr h="310896">
+                <a:tc>
+                  <a:txBody>
+                    <a:bodyPr wrap="square"/>
+                    <a:lstStyle/>
+                    <a:p>
+                      <a:pPr algn="l"/>
+                      <a:r>
+                        <a:rPr sz="1400" b="0">
+                          <a:solidFill>
+                            <a:srgbClr val="1F242B"/>
+                          </a:solidFill>
+                        </a:rPr>
+                        <a:t>v1.0：legacy 評分（池 20、無營收因子）</a:t>
+                      </a:r>
+                    </a:p>
+                  </a:txBody>
+                  <a:tcPr/>
+                </a:tc>
+                <a:tc>
+                  <a:txBody>
+                    <a:bodyPr wrap="square"/>
+                    <a:lstStyle/>
+                    <a:p>
+                      <a:pPr algn="ctr"/>
+                      <a:r>
+                        <a:rPr sz="1400" b="0">
+                          <a:solidFill>
+                            <a:srgbClr val="1F242B"/>
+                          </a:solidFill>
+                        </a:rPr>
+                        <a:t>+207.9%</a:t>
+                      </a:r>
+                    </a:p>
+                  </a:txBody>
+                  <a:tcPr/>
+                </a:tc>
+                <a:tc>
+                  <a:txBody>
+                    <a:bodyPr wrap="square"/>
+                    <a:lstStyle/>
+                    <a:p>
+                      <a:pPr algn="ctr"/>
+                      <a:r>
+                        <a:rPr sz="1400" b="0">
+                          <a:solidFill>
+                            <a:srgbClr val="1F242B"/>
+                          </a:solidFill>
+                        </a:rPr>
+                        <a:t>−36.0%</a:t>
+                      </a:r>
+                    </a:p>
+                  </a:txBody>
+                  <a:tcPr/>
+                </a:tc>
+                <a:tc>
+                  <a:txBody>
+                    <a:bodyPr wrap="square"/>
+                    <a:lstStyle/>
+                    <a:p>
+                      <a:pPr algn="ctr"/>
+                      <a:r>
+                        <a:rPr sz="1400" b="0">
+                          <a:solidFill>
+                            <a:srgbClr val="1F242B"/>
+                          </a:solidFill>
+                        </a:rPr>
+                        <a:t>0.69</a:t>
+                      </a:r>
+                    </a:p>
+                  </a:txBody>
+                  <a:tcPr/>
+                </a:tc>
+              </a:tr>
+              <a:tr h="310896">
+                <a:tc>
+                  <a:txBody>
+                    <a:bodyPr wrap="square"/>
+                    <a:lstStyle/>
+                    <a:p>
+                      <a:pPr algn="l"/>
+                      <a:r>
+                        <a:rPr sz="1400" b="0">
+                          <a:solidFill>
+                            <a:srgbClr val="1F242B"/>
+                          </a:solidFill>
+                        </a:rPr>
+                        <a:t>v1.1：zscore＋池 100＋營收因子（預設）</a:t>
+                      </a:r>
+                    </a:p>
+                  </a:txBody>
+                  <a:tcPr>
+                    <a:solidFill>
+                      <a:srgbClr val="F3F5F7"/>
+                    </a:solidFill>
+                  </a:tcPr>
+                </a:tc>
+                <a:tc>
+                  <a:txBody>
+                    <a:bodyPr wrap="square"/>
+                    <a:lstStyle/>
+                    <a:p>
+                      <a:pPr algn="ctr"/>
+                      <a:r>
+                        <a:rPr sz="1400" b="0">
+                          <a:solidFill>
+                            <a:srgbClr val="1F242B"/>
+                          </a:solidFill>
+                        </a:rPr>
+                        <a:t>+762.4%</a:t>
+                      </a:r>
+                    </a:p>
+                  </a:txBody>
+                  <a:tcPr>
+                    <a:solidFill>
+                      <a:srgbClr val="F3F5F7"/>
+                    </a:solidFill>
+                  </a:tcPr>
+                </a:tc>
+                <a:tc>
+                  <a:txBody>
+                    <a:bodyPr wrap="square"/>
+                    <a:lstStyle/>
+                    <a:p>
+                      <a:pPr algn="ctr"/>
+                      <a:r>
+                        <a:rPr sz="1400" b="0">
+                          <a:solidFill>
+                            <a:srgbClr val="1F242B"/>
+                          </a:solidFill>
+                        </a:rPr>
+                        <a:t>−53.7%</a:t>
+                      </a:r>
+                    </a:p>
+                  </a:txBody>
+                  <a:tcPr>
+                    <a:solidFill>
+                      <a:srgbClr val="F3F5F7"/>
+                    </a:solidFill>
+                  </a:tcPr>
+                </a:tc>
+                <a:tc>
+                  <a:txBody>
+                    <a:bodyPr wrap="square"/>
+                    <a:lstStyle/>
+                    <a:p>
+                      <a:pPr algn="ctr"/>
+                      <a:r>
+                        <a:rPr sz="1400" b="0">
+                          <a:solidFill>
+                            <a:srgbClr val="1F242B"/>
+                          </a:solidFill>
+                        </a:rPr>
+                        <a:t>0.95</a:t>
+                      </a:r>
+                    </a:p>
+                  </a:txBody>
+                  <a:tcPr>
+                    <a:solidFill>
+                      <a:srgbClr val="F3F5F7"/>
+                    </a:solidFill>
+                  </a:tcPr>
+                </a:tc>
+              </a:tr>
+              <a:tr h="310896">
+                <a:tc>
+                  <a:txBody>
+                    <a:bodyPr wrap="square"/>
+                    <a:lstStyle/>
+                    <a:p>
+                      <a:pPr algn="l"/>
+                      <a:r>
+                        <a:rPr sz="1400" b="0">
+                          <a:solidFill>
+                            <a:srgbClr val="1F242B"/>
+                          </a:solidFill>
+                        </a:rPr>
+                        <a:t>差別（v1.1 − v1.0）</a:t>
+                      </a:r>
+                    </a:p>
+                  </a:txBody>
+                  <a:tcPr/>
+                </a:tc>
+                <a:tc>
+                  <a:txBody>
+                    <a:bodyPr wrap="square"/>
+                    <a:lstStyle/>
+                    <a:p>
+                      <a:pPr algn="ctr"/>
+                      <a:r>
+                        <a:rPr sz="1400" b="0">
+                          <a:solidFill>
+                            <a:srgbClr val="1F242B"/>
+                          </a:solidFill>
+                        </a:rPr>
+                        <a:t>+554.5 pp（約 3.7 倍）</a:t>
+                      </a:r>
+                    </a:p>
+                  </a:txBody>
+                  <a:tcPr/>
+                </a:tc>
+                <a:tc>
+                  <a:txBody>
+                    <a:bodyPr wrap="square"/>
+                    <a:lstStyle/>
+                    <a:p>
+                      <a:pPr algn="ctr"/>
+                      <a:r>
+                        <a:rPr sz="1400" b="0">
+                          <a:solidFill>
+                            <a:srgbClr val="1F242B"/>
+                          </a:solidFill>
+                        </a:rPr>
+                        <a:t>回撤深 17.7 pp</a:t>
+                      </a:r>
+                    </a:p>
+                  </a:txBody>
+                  <a:tcPr/>
+                </a:tc>
+                <a:tc>
+                  <a:txBody>
+                    <a:bodyPr wrap="square"/>
+                    <a:lstStyle/>
+                    <a:p>
+                      <a:pPr algn="ctr"/>
+                      <a:r>
+                        <a:rPr sz="1400" b="0">
+                          <a:solidFill>
+                            <a:srgbClr val="1F242B"/>
+                          </a:solidFill>
+                        </a:rPr>
+                        <a:t>+0.26</a:t>
+                      </a:r>
+                    </a:p>
+                  </a:txBody>
+                  <a:tcPr/>
+                </a:tc>
+              </a:tr>
+              <a:tr h="310896">
+                <a:tc>
+                  <a:txBody>
+                    <a:bodyPr wrap="square"/>
+                    <a:lstStyle/>
+                    <a:p>
+                      <a:pPr algn="l"/>
+                      <a:r>
+                        <a:rPr sz="1400" b="0">
+                          <a:solidFill>
+                            <a:srgbClr val="1F242B"/>
+                          </a:solidFill>
+                        </a:rPr>
+                        <a:t>對照：0050 買進持有</a:t>
+                      </a:r>
+                    </a:p>
+                  </a:txBody>
+                  <a:tcPr>
+                    <a:solidFill>
+                      <a:srgbClr val="F3F5F7"/>
+                    </a:solidFill>
+                  </a:tcPr>
+                </a:tc>
+                <a:tc>
+                  <a:txBody>
+                    <a:bodyPr wrap="square"/>
+                    <a:lstStyle/>
+                    <a:p>
+                      <a:pPr algn="ctr"/>
+                      <a:r>
+                        <a:rPr sz="1400" b="0">
+                          <a:solidFill>
+                            <a:srgbClr val="1F242B"/>
+                          </a:solidFill>
+                        </a:rPr>
+                        <a:t>+477.6%</a:t>
+                      </a:r>
+                    </a:p>
+                  </a:txBody>
+                  <a:tcPr>
+                    <a:solidFill>
+                      <a:srgbClr val="F3F5F7"/>
+                    </a:solidFill>
+                  </a:tcPr>
+                </a:tc>
+                <a:tc>
+                  <a:txBody>
+                    <a:bodyPr wrap="square"/>
+                    <a:lstStyle/>
+                    <a:p>
+                      <a:pPr algn="ctr"/>
+                      <a:r>
+                        <a:rPr sz="1400" b="0">
+                          <a:solidFill>
+                            <a:srgbClr val="1F242B"/>
+                          </a:solidFill>
+                        </a:rPr>
+                        <a:t>−34.0%</a:t>
+                      </a:r>
+                    </a:p>
+                  </a:txBody>
+                  <a:tcPr>
+                    <a:solidFill>
+                      <a:srgbClr val="F3F5F7"/>
+                    </a:solidFill>
+                  </a:tcPr>
+                </a:tc>
+                <a:tc>
+                  <a:txBody>
+                    <a:bodyPr wrap="square"/>
+                    <a:lstStyle/>
+                    <a:p>
+                      <a:pPr algn="ctr"/>
+                      <a:r>
+                        <a:rPr sz="1400" b="0">
+                          <a:solidFill>
+                            <a:srgbClr val="1F242B"/>
+                          </a:solidFill>
+                        </a:rPr>
+                        <a:t>1.06</a:t>
+                      </a:r>
+                    </a:p>
+                  </a:txBody>
+                  <a:tcPr>
+                    <a:solidFill>
+                      <a:srgbClr val="F3F5F7"/>
+                    </a:solidFill>
+                  </a:tcPr>
+                </a:tc>
+              </a:tr>
+            </a:tbl>
+          </a:graphicData>
+        </a:graphic>
+      </p:graphicFrame>
+      <p:sp>
+        <p:nvSpPr>
+          <p:cNvPr id="5" name="TextBox 4"/>
+          <p:cNvSpPr txBox="1"/>
+          <p:nvPr/>
+        </p:nvSpPr>
+        <p:spPr>
+          <a:xfrm>
+            <a:off x="685800" y="3977639"/>
+            <a:ext cx="10835640" cy="1234440"/>
+          </a:xfrm>
+          <a:prstGeom prst="rect">
+            <a:avLst/>
+          </a:prstGeom>
+          <a:solidFill>
+            <a:srgbClr val="FDECEA"/>
+          </a:solidFill>
+          <a:ln>
+            <a:solidFill>
+              <a:srgbClr val="F0B48A"/>
+            </a:solidFill>
+          </a:ln>
+        </p:spPr>
+        <p:txBody>
+          <a:bodyPr wrap="square">
+            <a:spAutoFit/>
+          </a:bodyPr>
+          <a:lstStyle/>
+          <a:p>
+            <a:r>
+              <a:rPr sz="1500">
+                <a:solidFill>
+                  <a:srgbClr val="1F242B"/>
+                </a:solidFill>
+              </a:rPr>
+              <a:t>選股很重要：同樣的策略，v1.1 把選股加強後獲利大增（+207.9% → +762.4%）；但風險也一起放大（回撤 −36.0% → −53.7%）。
+要不要換？這是你的決定：保守留 current、追報酬切 revenue／aggressive——沒有免費的午餐。</a:t>
+            </a:r>
+          </a:p>
+        </p:txBody>
+      </p:sp>
+      <p:sp>
+        <p:nvSpPr>
+          <p:cNvPr id="6" name="TextBox 5"/>
+          <p:cNvSpPr txBox="1"/>
+          <p:nvPr/>
+        </p:nvSpPr>
+        <p:spPr>
+          <a:xfrm>
+            <a:off x="685800" y="5349240"/>
+            <a:ext cx="10835640" cy="1005840"/>
+          </a:xfrm>
+          <a:prstGeom prst="rect">
+            <a:avLst/>
+          </a:prstGeom>
+          <a:noFill/>
+        </p:spPr>
+        <p:txBody>
+          <a:bodyPr wrap="square">
+            <a:spAutoFit/>
+          </a:bodyPr>
+          <a:lstStyle/>
+          <a:p>
+            <a:pPr>
+              <a:spcAft>
+                <a:spcPts val="600"/>
+              </a:spcAft>
+            </a:pPr>
+            <a:r>
+              <a:rPr sz="1400" b="1">
+                <a:solidFill>
+                  <a:srgbClr val="C0392B"/>
+                </a:solidFill>
+              </a:rPr>
+              <a:t>• 先問自己一句：帳戶從 100 萬掉到 46 萬時，你抱不抱得住？抱不住就不要選高回撤的口徑</a:t>
+            </a:r>
+          </a:p>
+          <a:p>
+            <a:pPr>
+              <a:spcAft>
+                <a:spcPts val="600"/>
+              </a:spcAft>
+            </a:pPr>
+            <a:r>
+              <a:rPr sz="1400" b="0">
+                <a:solidFill>
+                  <a:srgbClr val="1F242B"/>
+                </a:solidFill>
+              </a:rPr>
+              <a:t>• 任何口徑都可以先用小額／紙上跑一段，再決定要不要變成正式設定（SELFSELECT_PRESET 隨時可切回）</a:t>
+            </a:r>
+          </a:p>
+        </p:txBody>
+      </p:sp>
+    </p:spTree>
+  </p:cSld>
+  <p:clrMapOvr>
+    <a:masterClrMapping/>
+  </p:clrMapOvr>
+</p:sld>
+</file>
+
 <file path=ppt/slides/slide2.xml><?xml version="1.0" encoding="utf-8"?>
 <p:sld xmlns:a="http://schemas.openxmlformats.org/drawingml/2006/main" xmlns:p="http://schemas.openxmlformats.org/presentationml/2006/main" xmlns:r="http://schemas.openxmlformats.org/officeDocument/2006/relationships">
   <p:cSld>
@@ -20868,8 +21598,8 @@
         </p:nvSpPr>
         <p:spPr>
           <a:xfrm>
-            <a:off x="685800" y="4663440"/>
-            <a:ext cx="10835640" cy="822960"/>
+            <a:off x="685800" y="3977639"/>
+            <a:ext cx="10835640" cy="685800"/>
           </a:xfrm>
           <a:prstGeom prst="rect">
             <a:avLst/>
@@ -20900,6 +21630,225 @@
           </a:p>
         </p:txBody>
       </p:sp>
+      <p:graphicFrame>
+        <p:nvGraphicFramePr>
+          <p:cNvPr id="6" name="Table 5"/>
+          <p:cNvGraphicFramePr>
+            <a:graphicFrameLocks noGrp="1"/>
+          </p:cNvGraphicFramePr>
+          <p:nvPr/>
+        </p:nvGraphicFramePr>
+        <p:xfrm>
+          <a:off x="685800" y="4892040"/>
+          <a:ext cx="10835638" cy="950976"/>
+        </p:xfrm>
+        <a:graphic>
+          <a:graphicData uri="http://schemas.openxmlformats.org/drawingml/2006/table">
+            <a:tbl>
+              <a:tblPr firstRow="1" bandRow="1">
+                <a:tableStyleId>{5C22544A-7EE6-4342-B048-85BDC9FD1C3A}</a:tableStyleId>
+              </a:tblPr>
+              <a:tblGrid>
+                <a:gridCol w="2754823"/>
+                <a:gridCol w="4591372"/>
+                <a:gridCol w="3489443"/>
+              </a:tblGrid>
+              <a:tr h="329184">
+                <a:tc>
+                  <a:txBody>
+                    <a:bodyPr wrap="square"/>
+                    <a:lstStyle/>
+                    <a:p>
+                      <a:pPr algn="l"/>
+                      <a:r>
+                        <a:rPr sz="1200" b="1">
+                          <a:solidFill>
+                            <a:srgbClr val="FFFFFF"/>
+                          </a:solidFill>
+                        </a:rPr>
+                        <a:t>上限設定（2024-11-29 實例）</a:t>
+                      </a:r>
+                    </a:p>
+                  </a:txBody>
+                  <a:tcPr>
+                    <a:solidFill>
+                      <a:srgbClr val="222A35"/>
+                    </a:solidFill>
+                  </a:tcPr>
+                </a:tc>
+                <a:tc>
+                  <a:txBody>
+                    <a:bodyPr wrap="square"/>
+                    <a:lstStyle/>
+                    <a:p>
+                      <a:pPr algn="ctr"/>
+                      <a:r>
+                        <a:rPr sz="1200" b="1">
+                          <a:solidFill>
+                            <a:srgbClr val="FFFFFF"/>
+                          </a:solidFill>
+                        </a:rPr>
+                        <a:t>選出的 5 檔</a:t>
+                      </a:r>
+                    </a:p>
+                  </a:txBody>
+                  <a:tcPr>
+                    <a:solidFill>
+                      <a:srgbClr val="222A35"/>
+                    </a:solidFill>
+                  </a:tcPr>
+                </a:tc>
+                <a:tc>
+                  <a:txBody>
+                    <a:bodyPr wrap="square"/>
+                    <a:lstStyle/>
+                    <a:p>
+                      <a:pPr algn="ctr"/>
+                      <a:r>
+                        <a:rPr sz="1200" b="1">
+                          <a:solidFill>
+                            <a:srgbClr val="FFFFFF"/>
+                          </a:solidFill>
+                        </a:rPr>
+                        <a:t>產業分布</a:t>
+                      </a:r>
+                    </a:p>
+                  </a:txBody>
+                  <a:tcPr>
+                    <a:solidFill>
+                      <a:srgbClr val="222A35"/>
+                    </a:solidFill>
+                  </a:tcPr>
+                </a:tc>
+              </a:tr>
+              <a:tr h="310896">
+                <a:tc>
+                  <a:txBody>
+                    <a:bodyPr wrap="square"/>
+                    <a:lstStyle/>
+                    <a:p>
+                      <a:pPr algn="l"/>
+                      <a:r>
+                        <a:rPr sz="1200" b="0">
+                          <a:solidFill>
+                            <a:srgbClr val="1F242B"/>
+                          </a:solidFill>
+                        </a:rPr>
+                        <a:t>0（不限）</a:t>
+                      </a:r>
+                    </a:p>
+                  </a:txBody>
+                  <a:tcPr/>
+                </a:tc>
+                <a:tc>
+                  <a:txBody>
+                    <a:bodyPr wrap="square"/>
+                    <a:lstStyle/>
+                    <a:p>
+                      <a:pPr algn="ctr"/>
+                      <a:r>
+                        <a:rPr sz="1200" b="0">
+                          <a:solidFill>
+                            <a:srgbClr val="1F242B"/>
+                          </a:solidFill>
+                        </a:rPr>
+                        <a:t>2345、2618、2603、2610、2609</a:t>
+                      </a:r>
+                    </a:p>
+                  </a:txBody>
+                  <a:tcPr/>
+                </a:tc>
+                <a:tc>
+                  <a:txBody>
+                    <a:bodyPr wrap="square"/>
+                    <a:lstStyle/>
+                    <a:p>
+                      <a:pPr algn="ctr"/>
+                      <a:r>
+                        <a:rPr sz="1200" b="0">
+                          <a:solidFill>
+                            <a:srgbClr val="1F242B"/>
+                          </a:solidFill>
+                        </a:rPr>
+                        <a:t>通信網路 1、航運 4 ← 等於押一個產業</a:t>
+                      </a:r>
+                    </a:p>
+                  </a:txBody>
+                  <a:tcPr/>
+                </a:tc>
+              </a:tr>
+              <a:tr h="310896">
+                <a:tc>
+                  <a:txBody>
+                    <a:bodyPr wrap="square"/>
+                    <a:lstStyle/>
+                    <a:p>
+                      <a:pPr algn="l"/>
+                      <a:r>
+                        <a:rPr sz="1200" b="0">
+                          <a:solidFill>
+                            <a:srgbClr val="1F242B"/>
+                          </a:solidFill>
+                        </a:rPr>
+                        <a:t>2 檔</a:t>
+                      </a:r>
+                    </a:p>
+                  </a:txBody>
+                  <a:tcPr>
+                    <a:solidFill>
+                      <a:srgbClr val="F3F5F7"/>
+                    </a:solidFill>
+                  </a:tcPr>
+                </a:tc>
+                <a:tc>
+                  <a:txBody>
+                    <a:bodyPr wrap="square"/>
+                    <a:lstStyle/>
+                    <a:p>
+                      <a:pPr algn="ctr"/>
+                      <a:r>
+                        <a:rPr sz="1200" b="0">
+                          <a:solidFill>
+                            <a:srgbClr val="1F242B"/>
+                          </a:solidFill>
+                        </a:rPr>
+                        <a:t>2345、2618、2603、2059、3533</a:t>
+                      </a:r>
+                    </a:p>
+                  </a:txBody>
+                  <a:tcPr>
+                    <a:solidFill>
+                      <a:srgbClr val="F3F5F7"/>
+                    </a:solidFill>
+                  </a:tcPr>
+                </a:tc>
+                <a:tc>
+                  <a:txBody>
+                    <a:bodyPr wrap="square"/>
+                    <a:lstStyle/>
+                    <a:p>
+                      <a:pPr algn="ctr"/>
+                      <a:r>
+                        <a:rPr sz="1200" b="0">
+                          <a:solidFill>
+                            <a:srgbClr val="1F242B"/>
+                          </a:solidFill>
+                        </a:rPr>
+                        <a:t>通信網路 1、航運 2、電子 2</a:t>
+                      </a:r>
+                    </a:p>
+                  </a:txBody>
+                  <a:tcPr>
+                    <a:solidFill>
+                      <a:srgbClr val="F3F5F7"/>
+                    </a:solidFill>
+                  </a:tcPr>
+                </a:tc>
+              </a:tr>
+            </a:tbl>
+          </a:graphicData>
+        </a:graphic>
+      </p:graphicFrame>
     </p:spTree>
   </p:cSld>
   <p:clrMapOvr>

--- a/plans/ppt/TW-SELFSELECT台股買賣自動化系統-W7-講稿版.pptx
+++ b/plans/ppt/TW-SELFSELECT台股買賣自動化系統-W7-講稿版.pptx
@@ -462,25 +462,23 @@
           <a:lstStyle/>
           <a:p>
             <a:r>
-              <a:rPr sz="1200" b="1"/>
               <a:t>⏱ 建議時間：30 秒</a:t>
             </a:r>
           </a:p>
-          <a:p>
-            <a:r>
-              <a:rPr sz="1200"/>
+          <a:p/>
+          <a:p>
+            <a:r>
               <a:t>歡迎回來第七堂課。前面六週我們把策略、回測、選股、部署都跑完了；這一週要補的是上線後才長出來的兩個東西：一個新的評分方式 zscore（現在是預設），以及可以選用的 AI 選股模式。</a:t>
             </a:r>
           </a:p>
           <a:p>
             <a:r>
-              <a:rPr sz="1200"/>
               <a:t>這一集不講理念，只講三件事：它怎麼算、參數在哪、怎麼用，以及我們測出來的結果跟代價。</a:t>
             </a:r>
           </a:p>
-          <a:p>
-            <a:r>
-              <a:rPr sz="1200" b="1"/>
+          <a:p/>
+          <a:p>
+            <a:r>
               <a:t>【講師提示】這一集數字都是 2016-2025、正常組、含成本回測；結尾一定要留時間講「誠實看數據」那兩頁。</a:t>
             </a:r>
           </a:p>
@@ -551,31 +549,28 @@
           <a:lstStyle/>
           <a:p>
             <a:r>
-              <a:rPr sz="1200" b="1"/>
               <a:t>⏱ 建議時間：2 分 30 秒</a:t>
             </a:r>
           </a:p>
-          <a:p>
-            <a:r>
-              <a:rPr sz="1200"/>
+          <a:p/>
+          <a:p>
+            <a:r>
               <a:t>這張表請看兩件事。</a:t>
             </a:r>
           </a:p>
           <a:p>
             <a:r>
-              <a:rPr sz="1200"/>
               <a:t>第一，橫著看營收因子：池 50 從 +291.1% 變 +441.7%、池 100 從 +411.1% 變 +762.4%、池 150 從 +541.7% 變 +940.9%。也就是說，唯一能穩定把報酬推上去的是營收因子。</a:t>
             </a:r>
           </a:p>
           <a:p>
             <a:r>
-              <a:rPr sz="1200"/>
               <a:t>第二，直著看池大小：不開營收因子時，池 50 甚至比池 20 差。所以「池越大越好」是錯的，池變大只是增加可選標的，必須同時換評分方式才有用。這也是為什麼 preset 是「池＋因子」綁在一起。</a:t>
             </a:r>
           </a:p>
-          <a:p>
-            <a:r>
-              <a:rPr sz="1200" b="1"/>
+          <a:p/>
+          <a:p>
+            <a:r>
               <a:t>【講師提示】池 20 幾乎沒差（+395.1% → +407.1%），因為池 20 的股票本來就有營收快取；這點可以順帶說明資料覆蓋率的影響。</a:t>
             </a:r>
           </a:p>
@@ -646,37 +641,33 @@
           <a:lstStyle/>
           <a:p>
             <a:r>
-              <a:rPr sz="1200" b="1"/>
               <a:t>⏱ 建議時間：3 分鐘</a:t>
             </a:r>
           </a:p>
-          <a:p>
-            <a:r>
-              <a:rPr sz="1200"/>
+          <a:p/>
+          <a:p>
+            <a:r>
               <a:t>這一頁請大家務必看完，因為它決定你要不要真的用預設。</a:t>
             </a:r>
           </a:p>
           <a:p>
             <a:r>
-              <a:rPr sz="1200"/>
               <a:t>第一，回撤：預設 revenue 是 −53.7%，0050 是 −34.0%。夏普 0.95 還低於 1.06。也就是「用更大的回撤換更高的報酬」，不是穩健超額報酬。</a:t>
             </a:r>
           </a:p>
           <a:p>
             <a:r>
-              <a:rPr sz="1200"/>
               <a:t>第二，這是樣本內結果：aggressive 是十六組裡事後挑出來的最好一組，沒有做非重疊窗口或 walk-forward，實盤很可能拿不到一樣的數字。</a:t>
             </a:r>
           </a:p>
           <a:p>
             <a:r>
-              <a:rPr sz="1200"/>
               <a:t>第三，結果對資料覆蓋率極度敏感：月營收快取從 515 檔補到 645 檔，同一格就從 +1070.5% 變 +1323.6%，差 253 個百分點。所以我們現在講數字，一定連資料快照一起講。</a:t>
             </a:r>
           </a:p>
-          <a:p>
-            <a:r>
-              <a:rPr sz="1200" b="1"/>
+          <a:p/>
+          <a:p>
+            <a:r>
               <a:t>【講師提示】這頁是整集最重要的道德頁：寧可講難聽，也不要讓學員以為撿到聖杯。</a:t>
             </a:r>
           </a:p>
@@ -747,31 +738,28 @@
           <a:lstStyle/>
           <a:p>
             <a:r>
-              <a:rPr sz="1200" b="1"/>
               <a:t>⏱ 建議時間：2 分 30 秒</a:t>
             </a:r>
           </a:p>
-          <a:p>
-            <a:r>
-              <a:rPr sz="1200"/>
+          <a:p/>
+          <a:p>
+            <a:r>
               <a:t>很多人聽到 AI 選股，想像的是把股票清單丟給 ChatGPT。我們的做法剛好相反：先把資料整理成「只能看到當天之前資訊」的封包，再讓模型在封包裡挑，最後把它的答案連同引用的證據一起存檔。</a:t>
             </a:r>
           </a:p>
           <a:p>
             <a:r>
-              <a:rPr sz="1200"/>
               <a:t>封包裡有：價格動能、距 52 週高、PER、月營收年增率、（可選）法人與新聞，但新聞有截止時間。模型必須用我們給的編號引用它看過的資料，不能自己發明新股票代號——不符合就直接判為不合法。</a:t>
             </a:r>
           </a:p>
           <a:p>
             <a:r>
-              <a:rPr sz="1200"/>
               <a:t>每一份封包、提示詞、回應、稽核檔都留 sha256，所以三個月後你還能回答「當初它為什麼挑這五檔」。</a:t>
             </a:r>
           </a:p>
-          <a:p>
-            <a:r>
-              <a:rPr sz="1200" b="1"/>
+          <a:p/>
+          <a:p>
+            <a:r>
               <a:t>【講師提示】這一頁建立信任感：AI 選股的重點不是模型多聰明，而是可稽核、不可事後修改。</a:t>
             </a:r>
           </a:p>
@@ -842,31 +830,28 @@
           <a:lstStyle/>
           <a:p>
             <a:r>
-              <a:rPr sz="1200" b="1"/>
               <a:t>⏱ 建議時間：2 分 30 秒</a:t>
             </a:r>
           </a:p>
-          <a:p>
-            <a:r>
-              <a:rPr sz="1200"/>
+          <a:p/>
+          <a:p>
+            <a:r>
               <a:t>這是真實的翻車。第一版封包的 as_of 是「當月第一個交易日的收盤」，而引擎真正選股用的是「前一個交易日收盤」——等於模型比程式多看到了當天的價格，而那天的價格正好是它的進場價。</a:t>
             </a:r>
           </a:p>
           <a:p>
             <a:r>
-              <a:rPr sz="1200"/>
               <a:t>結果就是漂亮的假數字：AI 停泊口徑 +651.7%。修正後重跑 117 份封包，變成 +349.4%，跟程式同一口徑比才公平。</a:t>
             </a:r>
           </a:p>
           <a:p>
             <a:r>
-              <a:rPr sz="1200"/>
               <a:t>所以現在的規則是：封包 as_of 一律等於引擎的 sel_date（前一個交易日）；新聞截止 13:30；月營收用公告時間或次月 10 日保守估。這三條都寫進測試了。</a:t>
             </a:r>
           </a:p>
-          <a:p>
-            <a:r>
-              <a:rPr sz="1200" b="1"/>
+          <a:p/>
+          <a:p>
+            <a:r>
               <a:t>【講師提示】這頁可以用來教「回測偏誤怎麼發生的」，比抽象講解有效得多。</a:t>
             </a:r>
           </a:p>
@@ -937,37 +922,33 @@
           <a:lstStyle/>
           <a:p>
             <a:r>
-              <a:rPr sz="1200" b="1"/>
               <a:t>⏱ 建議時間：3 分鐘</a:t>
             </a:r>
           </a:p>
-          <a:p>
-            <a:r>
-              <a:rPr sz="1200"/>
+          <a:p/>
+          <a:p>
+            <a:r>
               <a:t>先定義名詞，不然後面會聽不懂。D1＝每個月的「選股第一日」，也就是該月第 1 個交易日；盤後 13:36 起系統會跑選股、改寫 .env 的持股名單。D2＝第 2 個交易日，13:25–13:30 依訊號換股進場。所以 D1 是「決定買什麼」的那天，D2 是「真的買」的那天。</a:t>
             </a:r>
           </a:p>
           <a:p>
             <a:r>
-              <a:rPr sz="1200"/>
               <a:t>實作流程五步。</a:t>
             </a:r>
           </a:p>
           <a:p>
             <a:r>
-              <a:rPr sz="1200"/>
               <a:t>第一步，.env 設 SELFSELECT_AI=1，期限預設 13:50。第二步，D1 你跑 scripts/ai_pick_dsh.py --emit prompt，它會依當天資料產生封包與提示詞。第三步，把提示詞貼給任何一個 LLM（在 DSH 裡切模型也可以），拿到 JSON。</a:t>
             </a:r>
           </a:p>
           <a:p>
             <a:r>
-              <a:rPr sz="1200"/>
               <a:t>第四步，用 --picks-file 把名單交回程式，它會驗證格式與代號，然後寫進 .env 的 PC_ 名單，同時在 logs/selfselect_auto.json 記下 ai_applied=YYYY-MM。第五步，什麼都不做也行：期限前沒完成，系統就自動退回規則選股，而且不會反過來覆蓋你已套用的名單。</a:t>
             </a:r>
           </a:p>
-          <a:p>
-            <a:r>
-              <a:rPr sz="1200" b="1"/>
+          <a:p/>
+          <a:p>
+            <a:r>
               <a:t>【講師提示】現場示範一次 --emit prompt 的輸出最有效；提醒學員不要把 AI 名單直接手改 .env，要用 --picks-file 走驗證。</a:t>
             </a:r>
           </a:p>
@@ -1038,31 +1019,28 @@
           <a:lstStyle/>
           <a:p>
             <a:r>
-              <a:rPr sz="1200" b="1"/>
               <a:t>⏱ 建議時間：3 分鐘</a:t>
             </a:r>
           </a:p>
-          <a:p>
-            <a:r>
-              <a:rPr sz="1200"/>
+          <a:p/>
+          <a:p>
+            <a:r>
               <a:t>我們做了兩種比較。第一種是「LLM 親自判斷 vs 公式」：2024 年 12 個選股日，用同一批封包讓 LLM 挑，結果與 z 分數公式幾乎打平，配對檢定全部不顯著。</a:t>
             </a:r>
           </a:p>
           <a:p>
             <a:r>
-              <a:rPr sz="1200"/>
               <a:t>第二種是「AI 名單 vs 程式選股」的整段回測：AI 名單停泊口徑 +348.2%，程式（zscore）是 +762.4%——以目前版本，程式反而比較好。</a:t>
             </a:r>
           </a:p>
           <a:p>
             <a:r>
-              <a:rPr sz="1200"/>
               <a:t>要特別說清楚：AI 名單是用舊宇宙的封包產生的（少了 62 檔下市股、也沒有營收因子），所以這個比較對 AI 稍微不利；要嚴格比，得重跑 117 份封包。誠實的結論是：目前沒有證據支持「讓 AI 挑」比公式好，但也還沒證明它比較差。</a:t>
             </a:r>
           </a:p>
-          <a:p>
-            <a:r>
-              <a:rPr sz="1200" b="1"/>
+          <a:p/>
+          <a:p>
+            <a:r>
               <a:t>【講師提示】不要替 AI 加油也不要唱衰；把「樣本 12 天、全部不顯著」講清楚就是最好的教學。</a:t>
             </a:r>
           </a:p>
@@ -1133,37 +1111,33 @@
           <a:lstStyle/>
           <a:p>
             <a:r>
-              <a:rPr sz="1200" b="1"/>
               <a:t>⏱ 建議時間：3 分鐘</a:t>
             </a:r>
           </a:p>
-          <a:p>
-            <a:r>
-              <a:rPr sz="1200"/>
+          <a:p/>
+          <a:p>
+            <a:r>
               <a:t>最後一段講改進。我按「改一個能拿到多少」排序，前三項是我們認為最該先做的。</a:t>
             </a:r>
           </a:p>
           <a:p>
             <a:r>
-              <a:rPr sz="1200"/>
               <a:t>第一，驗證強度：現在所有超過 0050 的結果都來自同一段 2016-2025，而且是在十六組裡挑出來的。要做非重疊窗口加 walk-forward，否則不知道是真本事還是運氣。</a:t>
             </a:r>
           </a:p>
           <a:p>
             <a:r>
-              <a:rPr sz="1200"/>
               <a:t>第二，產業上限：程式已經接進實盤（變數 SELFSELECT_MAX_PER_SECTOR，preset aggressive 會開），但預設是關的，而且回測有效的是「池 150」情境，實盤現在跑池 100，這格還沒實測過，預設值也還沒定。第三，資料：上櫃下市股沒納入、法人只有 41 個交易日、新聞預設關閉、成本沒算滑價。</a:t>
             </a:r>
           </a:p>
           <a:p>
             <a:r>
-              <a:rPr sz="1200"/>
               <a:t>最後一項是因子本身：目前只有動能、評價、營收，缺品質（ROE）、低波動、法人籌碼。但每加一個因子就要做一次 A/B，不然就是過度擬合。</a:t>
             </a:r>
           </a:p>
-          <a:p>
-            <a:r>
-              <a:rPr sz="1200" b="1"/>
+          <a:p/>
+          <a:p>
+            <a:r>
               <a:t>【講師提示】這頁可以當作業：請學員挑一項，用同一段資料做一次 A/B，下次上課報告。</a:t>
             </a:r>
           </a:p>
@@ -1234,37 +1208,33 @@
           <a:lstStyle/>
           <a:p>
             <a:r>
-              <a:rPr sz="1200" b="1"/>
               <a:t>⏱ 建議時間：1 分 30 秒</a:t>
             </a:r>
           </a:p>
-          <a:p>
-            <a:r>
-              <a:rPr sz="1200"/>
+          <a:p/>
+          <a:p>
+            <a:r>
               <a:t>這一頁是專案紀律，跟策略無關但很重要。</a:t>
             </a:r>
           </a:p>
           <a:p>
             <a:r>
-              <a:rPr sz="1200"/>
               <a:t>第一，只要程式有修改，版號就要加一：1.1.0、1.1.1、1.1.2、1.1.3。純文件修改不動版號；大升版由我決定時再跳。</a:t>
             </a:r>
           </a:p>
           <a:p>
             <a:r>
-              <a:rPr sz="1200"/>
               <a:t>第二，部署由你自己手動跑 ./deploy_source.sh，任何自動化流程都不代跑。換版後看啟動 banner 的版號與原始碼指紋就知道跑的是哪一版。</a:t>
             </a:r>
           </a:p>
           <a:p>
             <a:r>
-              <a:rPr sz="1200"/>
               <a:t>第三，儀表板發佈走 gh-pages 分支，main 只由人推——不然機器人每天推 commit，你本機 push 就會被拒（我們真的遇過）。</a:t>
             </a:r>
           </a:p>
-          <a:p>
-            <a:r>
-              <a:rPr sz="1200" b="1"/>
+          <a:p/>
+          <a:p>
+            <a:r>
               <a:t>【講師提示】這頁可以縮短；若時間不夠，只講「改程式就加版號、部署自己跑、main 只由人推」三句。</a:t>
             </a:r>
           </a:p>
@@ -1335,31 +1305,28 @@
           <a:lstStyle/>
           <a:p>
             <a:r>
-              <a:rPr sz="1200" b="1"/>
               <a:t>⏱ 建議時間：2 分鐘</a:t>
             </a:r>
           </a:p>
-          <a:p>
-            <a:r>
-              <a:rPr sz="1200"/>
+          <a:p/>
+          <a:p>
+            <a:r>
               <a:t>收尾。三個數字：預設口徑 +762.4%（0050 +477.6%）、回撤 −53.7%（0050 −34%）、夏普 0.95（0050 1.06）。兩個動作：一是想回舊行為設 SELFSELECT_PRESET=current，二是想試 AI 選股設 SELFSELECT_AI=1 然後按五步流程跑一次。一個提醒：這仍是樣本內結果，還沒有 walk-forward，先小額或紙上跑一段再說。</a:t>
             </a:r>
           </a:p>
           <a:p>
             <a:r>
-              <a:rPr sz="1200"/>
               <a:t>作業：挑一個改進項目做一次 A/B（例如把產業上限接進實盤），下次上課報告你的數字與口徑。</a:t>
             </a:r>
           </a:p>
           <a:p>
             <a:r>
-              <a:rPr sz="1200"/>
               <a:t>另外要說清楚這門課的節奏：從 2026-10-30 起才開始真正的實測與持續改進，所以講義上的數字是「當天版本」，之後每一次程式修改都會升版號並更新到 Git 專案。要看最新版、最新回測與最新的改進清單，一律以 Git 專案為準。</a:t>
             </a:r>
           </a:p>
-          <a:p>
-            <a:r>
-              <a:rPr sz="1200" b="1"/>
+          <a:p/>
+          <a:p>
+            <a:r>
               <a:t>【講師提示】最後留 30 秒問答；把 Git 專案網址、README 的「改進空間」與 cairn/LOG 一起指給學員當延伸閱讀。</a:t>
             </a:r>
           </a:p>
@@ -1430,37 +1397,33 @@
           <a:lstStyle/>
           <a:p>
             <a:r>
-              <a:rPr sz="1200" b="1"/>
               <a:t>⏱ 建議時間：3 分鐘</a:t>
             </a:r>
           </a:p>
-          <a:p>
-            <a:r>
-              <a:rPr sz="1200"/>
+          <a:p/>
+          <a:p>
+            <a:r>
               <a:t>這頁是整集的收尾提醒，也是最重要的一頁。</a:t>
             </a:r>
           </a:p>
           <a:p>
             <a:r>
-              <a:rPr sz="1200"/>
               <a:t>同樣的策略骨架、同樣的成本假設，v1.0 換到 v1.1 唯一的差別就是「選股變強了」——評分從 legacy 換成 zscore，池子放大、再加上營收因子。結果是總報酬從 +207.9% 變成 +762.4%，將近 3.7 倍。這就是「選股很重要」。</a:t>
             </a:r>
           </a:p>
           <a:p>
             <a:r>
-              <a:rPr sz="1200"/>
               <a:t>但同一張表右邊兩欄請一起看：最大回撤從 −36.0% 變成 −53.7%，深了將近 18 個百分點；夏普只從 0.69 升到 0.95，還是輸給 0050 的 1.06。換句話說，你拿到的不是「更穩的報酬」，而是「更刺激的報酬」。</a:t>
             </a:r>
           </a:p>
           <a:p>
             <a:r>
-              <a:rPr sz="1200"/>
               <a:t>所以最後這句要講清楚：風險與獲利之間怎麼取捨，是使用者自己的決定，不是策略作者能替你決定的。保守的人留在 current（+411.1%、回撤 −52.4%），想追報酬的切 revenue 或 aggressive，但請先想清楚「−53.7% 的時候你抱不抱得住」。</a:t>
             </a:r>
           </a:p>
-          <a:p>
-            <a:r>
-              <a:rPr sz="1200" b="1"/>
+          <a:p/>
+          <a:p>
+            <a:r>
               <a:t>【講師提示】這一頁請放慢速度；可以現場問一句「如果你的帳戶從 100 萬掉到 46 萬，你會不會手動砍掉？」，讓學員自己回答。</a:t>
             </a:r>
           </a:p>
@@ -1531,31 +1494,28 @@
           <a:lstStyle/>
           <a:p>
             <a:r>
-              <a:rPr sz="1200" b="1"/>
               <a:t>⏱ 建議時間：1 分鐘</a:t>
             </a:r>
           </a:p>
-          <a:p>
-            <a:r>
-              <a:rPr sz="1200"/>
+          <a:p/>
+          <a:p>
+            <a:r>
               <a:t>先給大家一張地圖，四頁之後你就知道整集的骨架。</a:t>
             </a:r>
           </a:p>
           <a:p>
             <a:r>
-              <a:rPr sz="1200"/>
               <a:t>第一，新加的 zscore 和 AI 選股是什麼、回測結果如何。第二，zscore 有哪些重要參數可以調。第三，AI 選股實際上怎麼操作。第四，還有哪些明顯的改進空間——這一段我會直接說我們還不夠好的地方。</a:t>
             </a:r>
           </a:p>
           <a:p>
             <a:r>
-              <a:rPr sz="1200"/>
               <a:t>最後那句總結請大家記住：換了評分、多了 AI 選項，但兩者都還沒站穩。從 2026-10-30 起我們才開始真正的實測，之後會持續改進；所有最新數字、參數與更新都在 Git 專案上，講義拿到的是當天版本。</a:t>
             </a:r>
           </a:p>
-          <a:p>
-            <a:r>
-              <a:rPr sz="1200" b="1"/>
+          <a:p/>
+          <a:p>
+            <a:r>
               <a:t>【講師提示】課程結束後把 Git 專案網址留給學員；提醒他們數字會更新，回測結論以 repo 內文件為準。</a:t>
             </a:r>
           </a:p>
@@ -1626,25 +1586,23 @@
           <a:lstStyle/>
           <a:p>
             <a:r>
-              <a:rPr sz="1200" b="1"/>
               <a:t>⏱ 建議時間：2 分鐘</a:t>
             </a:r>
           </a:p>
-          <a:p>
-            <a:r>
-              <a:rPr sz="1200"/>
+          <a:p/>
+          <a:p>
+            <a:r>
               <a:t>v1.0 用的評分叫 legacy，是「動能＋技術面＋穩定度＋催化劑」的綜合分。實測有兩個問題：第一，它跟大盤比是明顯落後的（+61.4% vs 0050 的 +477.6%）。第二，它的分數不可解釋——你看不出為什麼 A 比 B 高分。</a:t>
             </a:r>
           </a:p>
           <a:p>
             <a:r>
-              <a:rPr sz="1200"/>
               <a:t>第三個問題跟選股無關，是資料：宇宙裡沒有已下市個股、PER 快取只蓋四成、月營收只蓋一半。資料不修，換什麼評分都是在假的資料上調參數。所以 v1.1 是「先修資料，再換評分」。</a:t>
             </a:r>
           </a:p>
-          <a:p>
-            <a:r>
-              <a:rPr sz="1200" b="1"/>
+          <a:p/>
+          <a:p>
+            <a:r>
               <a:t>【講師提示】這一頁是動機頁，不要花超過兩分鐘；重點是讓學員接受「先修資料」的順序。</a:t>
             </a:r>
           </a:p>
@@ -1715,31 +1673,28 @@
           <a:lstStyle/>
           <a:p>
             <a:r>
-              <a:rPr sz="1200" b="1"/>
               <a:t>⏱ 建議時間：2 分 30 秒</a:t>
             </a:r>
           </a:p>
-          <a:p>
-            <a:r>
-              <a:rPr sz="1200"/>
+          <a:p/>
+          <a:p>
+            <a:r>
               <a:t>zscore 的做法很樸素：同一批候選股裡，把每個因子換算成「相對強弱」（z 分數），再加權排序。</a:t>
             </a:r>
           </a:p>
           <a:p>
             <a:r>
-              <a:rPr sz="1200"/>
               <a:t>四個因子：63 日動能（權重 0.40）、20 日動能（0.25）、距離 52 週高還有多遠（0.20）、本益比（0.15，而且是扣分——越貴越低分）。開營收因子時，把 63 日動能降到 0.25，多一個月營收年增率 0.15。</a:t>
             </a:r>
           </a:p>
           <a:p>
             <a:r>
-              <a:rPr sz="1200"/>
               <a:t>白話：它同時看「最近有沒有在漲」「有沒有接近一年高點」「貴不貴」，最後一個是「基本面有沒有變好」。</a:t>
             </a:r>
           </a:p>
-          <a:p>
-            <a:r>
-              <a:rPr sz="1200" b="1"/>
+          <a:p/>
+          <a:p>
+            <a:r>
               <a:t>【講師提示】公式一定要配白話講；學員最容易卡在「z 分數是什麼」，用「同一班同學的排名」比喻最快。</a:t>
             </a:r>
           </a:p>
@@ -1810,31 +1765,28 @@
           <a:lstStyle/>
           <a:p>
             <a:r>
-              <a:rPr sz="1200" b="1"/>
               <a:t>⏱ 建議時間：2 分鐘</a:t>
             </a:r>
           </a:p>
-          <a:p>
-            <a:r>
-              <a:rPr sz="1200"/>
+          <a:p/>
+          <a:p>
+            <a:r>
               <a:t>zscore 有一個很多人會忽略的前置條件：本益比必須大於 0 且不超過 40，沒有 PER 的股票直接不列入。</a:t>
             </a:r>
           </a:p>
           <a:p>
             <a:r>
-              <a:rPr sz="1200"/>
               <a:t>這條規則本身合理——虧錢的公司 PER 是負的、太貴的不想追。但它有一個副作用：如果 PER 資料本身不完整，等於「先偷偷刪掉一批候選股」。我們就是這樣踩到的：PER 快取當時只有 267 檔，宇宙有 672 檔，等於六成候選股在評分前就不見了。</a:t>
             </a:r>
           </a:p>
           <a:p>
             <a:r>
-              <a:rPr sz="1200"/>
               <a:t>所以 v1.1 把 PER 補到 672 檔。這件事對回測結果的影響，比任何參數調整都大。</a:t>
             </a:r>
           </a:p>
-          <a:p>
-            <a:r>
-              <a:rPr sz="1200" b="1"/>
+          <a:p/>
+          <a:p>
+            <a:r>
               <a:t>【講師提示】這頁是「資料正確性」的核心案例，建議花時間講清楚：門檻本身沒錯，錯的是資料覆蓋率。</a:t>
             </a:r>
           </a:p>
@@ -1905,37 +1857,33 @@
           <a:lstStyle/>
           <a:p>
             <a:r>
-              <a:rPr sz="1200" b="1"/>
               <a:t>⏱ 建議時間：3 分鐘</a:t>
             </a:r>
           </a:p>
-          <a:p>
-            <a:r>
-              <a:rPr sz="1200"/>
+          <a:p/>
+          <a:p>
+            <a:r>
               <a:t>這頁是操作頁，學員會截圖。分三類：</a:t>
             </a:r>
           </a:p>
           <a:p>
             <a:r>
-              <a:rPr sz="1200"/>
               <a:t>第一類「評分本身」：SCORING_MODEL 決定用 zscore 還是 legacy；權重寫在 core/scoring.py，改了要一起改測試跟文件；PER_MAX 是資格門檻 40。</a:t>
             </a:r>
           </a:p>
           <a:p>
             <a:r>
-              <a:rPr sz="1200"/>
               <a:t>第二類「選股口徑」：SELFSELECT_PRESET 是總開關（current／revenue／aggressive），它會一次設定池大小、營收因子、產業上限；SELFSELECT_POOL_N 是池大小、SELFSELECT_FACTOR_REVENUE 與 SELFSELECT_MAX_PER_SECTOR 可以個別覆寫——記住規則：SELFSELECT_ 前綴的明示值優先於 preset。</a:t>
             </a:r>
           </a:p>
           <a:p>
             <a:r>
-              <a:rPr sz="1200"/>
               <a:t>第三類「換股節奏與補位」：TOP_N、REBAL_MONTHS、FILL_MODE。</a:t>
             </a:r>
           </a:p>
-          <a:p>
-            <a:r>
-              <a:rPr sz="1200" b="1"/>
+          <a:p/>
+          <a:p>
+            <a:r>
               <a:t>【講師提示】提醒學員：沒有 SELFSELECT_ 前綴的 POOL_N／FACTOR_REVENUE 是「回測旋鈕」，實盤不會讀。</a:t>
             </a:r>
           </a:p>
@@ -2006,37 +1954,33 @@
           <a:lstStyle/>
           <a:p>
             <a:r>
-              <a:rPr sz="1200" b="1"/>
               <a:t>⏱ 建議時間：2 分鐘</a:t>
             </a:r>
           </a:p>
-          <a:p>
-            <a:r>
-              <a:rPr sz="1200"/>
+          <a:p/>
+          <a:p>
+            <a:r>
               <a:t>我們的實驗方式是「一次只動一個維度」，而且是同一段資料、同一批成本假設。</a:t>
             </a:r>
           </a:p>
           <a:p>
             <a:r>
-              <a:rPr sz="1200"/>
               <a:t>這張表是三個維度的掃描：池大小 20/50/100/150、營收因子開或關、產業上限兩個。總共十六組。為什麼不用大網格一次掃到底？因為組合越多，你越容易挑到剛好漂亮的那一組——那不是策略變好，是過度擬合。</a:t>
             </a:r>
           </a:p>
           <a:p>
             <a:r>
-              <a:rPr sz="1200"/>
               <a:t>右邊那條紅線是提醒：比較參數之前，先把資料補滿並記下快照，不然你會把「資料補齊」誤讀成「策略變好」。</a:t>
             </a:r>
           </a:p>
           <a:p>
             <a:r>
-              <a:rPr sz="1200"/>
               <a:t>最下面這張是實例，直接看名單差別：2024-11-29 那天，產業上限關掉時前五名有四檔是航運（2618、2603、2610、2609）——那不叫分散五檔，那叫押一個產業。把上限設成 2 檔之後，航運只留 2 檔，補進 2059、3533，產業變成 1／2／2。</a:t>
             </a:r>
           </a:p>
-          <a:p>
-            <a:r>
-              <a:rPr sz="1200" b="1"/>
+          <a:p/>
+          <a:p>
+            <a:r>
               <a:t>【講師提示】如果學員問「為什麼不做更細的網格」，就用過度擬合回答，並指向後面「誠實看數據」那頁。</a:t>
             </a:r>
           </a:p>
@@ -2107,31 +2051,28 @@
           <a:lstStyle/>
           <a:p>
             <a:r>
-              <a:rPr sz="1200" b="1"/>
               <a:t>⏱ 建議時間：2 分鐘</a:t>
             </a:r>
           </a:p>
-          <a:p>
-            <a:r>
-              <a:rPr sz="1200"/>
+          <a:p/>
+          <a:p>
+            <a:r>
               <a:t>先看最直接的對照：同樣的程式、同樣的池、同樣的成本，只換評分器。</a:t>
             </a:r>
           </a:p>
           <a:p>
             <a:r>
-              <a:rPr sz="1200"/>
               <a:t>legacy 閒置資金是 +61.4%，zscore 是 +129.4%，一倍多。若把閒置資金停泊 0050，legacy +207.9%、zscore +762.4%——差距被放大了，因為停泊讓資金全程都在市場裡。</a:t>
             </a:r>
           </a:p>
           <a:p>
             <a:r>
-              <a:rPr sz="1200"/>
               <a:t>所以「AI 那套公式比較好」這句話，有一半其實是「評分方式」的功勞，不是模型的神秘能力。這也是我們把它做成可選項、而且直接設成預設的原因。</a:t>
             </a:r>
           </a:p>
-          <a:p>
-            <a:r>
-              <a:rPr sz="1200" b="1"/>
+          <a:p/>
+          <a:p>
+            <a:r>
               <a:t>【講師提示】這一頁只需要學員記住兩個數字：+207.9% → +762.4%（停泊口徑）。</a:t>
             </a:r>
           </a:p>
@@ -2202,31 +2143,28 @@
           <a:lstStyle/>
           <a:p>
             <a:r>
-              <a:rPr sz="1200" b="1"/>
               <a:t>⏱ 建議時間：2 分 30 秒</a:t>
             </a:r>
           </a:p>
-          <a:p>
-            <a:r>
-              <a:rPr sz="1200"/>
+          <a:p/>
+          <a:p>
+            <a:r>
               <a:t>v1.1 把選股口徑做成三個選項，預設是中間那個 revenue。</a:t>
             </a:r>
           </a:p>
           <a:p>
             <a:r>
-              <a:rPr sz="1200"/>
               <a:t>current 是舊行為，報酬 +411.1%，還是輸 0050。revenue 是預設：池 100 加營收因子，總報酬 +762.4% 首次超過 0050，但回撤 −53.7% 是三個裡最深的，夏普 0.95 還是低於 1.06。aggressive 是池 150 加營收加產業上限，報酬 +1323.6%、回撤 −40.2%、夏普 1.15——夏普首次超過 0050。</a:t>
             </a:r>
           </a:p>
           <a:p>
             <a:r>
-              <a:rPr sz="1200"/>
               <a:t>看起來 aggressive 最好，但它是在同一段歷史上十六組裡事後挑出來的，沒有做 walk-forward。所以我們不把它設成預設，只提供開關。</a:t>
             </a:r>
           </a:p>
-          <a:p>
-            <a:r>
-              <a:rPr sz="1200" b="1"/>
+          <a:p/>
+          <a:p>
+            <a:r>
               <a:t>【講師提示】務必強調「報酬贏 ≠ 策略贏」：回撤 −40~−54% 都大於 0050 的 −34%。</a:t>
             </a:r>
           </a:p>

--- a/plans/ppt/TW-SELFSELECT台股買賣自動化系統-W7-講稿版.pptx
+++ b/plans/ppt/TW-SELFSELECT台股買賣自動化系統-W7-講稿版.pptx
@@ -652,7 +652,7 @@
           </a:p>
           <a:p>
             <a:r>
-              <a:t>第一，回撤：預設 revenue 是 −53.7%，0050 是 −34.0%。夏普 0.95 還低於 1.06。也就是「用更大的回撤換更高的報酬」，不是穩健超額報酬。</a:t>
+              <a:t>第一，回撤：預設 aggressive 是 −40.2%，0050 是 −34.0%；夏普 1.15 雖然首次超過 1.06，但回撤仍比大盤深。也就是「用更大的回撤換更高的報酬」，不是穩健超額報酬。</a:t>
             </a:r>
           </a:p>
           <a:p>
@@ -1030,7 +1030,7 @@
           </a:p>
           <a:p>
             <a:r>
-              <a:t>第二種是「AI 名單 vs 程式選股」的整段回測：AI 名單停泊口徑 +348.2%，程式（zscore）是 +762.4%——以目前版本，程式反而比較好。</a:t>
+              <a:t>第二種是「AI 名單 vs 程式選股」的整段回測：AI 名單停泊口徑 +348.2%，程式（zscore，同一個池 20 口徑）是 +407.1%——以目前版本，程式反而比較好。</a:t>
             </a:r>
           </a:p>
           <a:p>
@@ -1127,7 +1127,7 @@
           </a:p>
           <a:p>
             <a:r>
-              <a:t>第二，產業上限：程式已經接進實盤（變數 SELFSELECT_MAX_PER_SECTOR，preset aggressive 會開），但預設是關的，而且回測有效的是「池 150」情境，實盤現在跑池 100，這格還沒實測過，預設值也還沒定。第三，資料：上櫃下市股沒納入、法人只有 41 個交易日、新聞預設關閉、成本沒算滑價。</a:t>
+              <a:t>第二，產業上限：它已經是預設的一部分（aggressive 的 MAX_PER_SECTOR=2），把回撤從 −54.9% 壓到 −40.2%、接下來要驗證的是「實盤真的跑池 150＋上限 2 能不能複製」——目前只有回測，沒有實盤樣本。第三，資料：上櫃下市股沒納入、法人只有 41 個交易日、新聞預設關閉、成本沒算滑價。</a:t>
             </a:r>
           </a:p>
           <a:p>
@@ -1311,7 +1311,7 @@
           <a:p/>
           <a:p>
             <a:r>
-              <a:t>收尾。三個數字：預設口徑 +762.4%（0050 +477.6%）、回撤 −53.7%（0050 −34%）、夏普 0.95（0050 1.06）。兩個動作：一是想回舊行為設 SELFSELECT_PRESET=current，二是想試 AI 選股設 SELFSELECT_AI=1 然後按五步流程跑一次。一個提醒：這仍是樣本內結果，還沒有 walk-forward，先小額或紙上跑一段再說。</a:t>
+              <a:t>收尾。三個數字：預設口徑 +1323.6%（0050 +477.6%）、回撤 −40.2%（0050 −34%）、夏普 1.15（0050 1.06）。兩個動作：一是想保守一點設 SELFSELECT_PRESET=revenue（或 current），二是想試 AI 選股設 SELFSELECT_AI=1 然後按五步流程跑一次。一個提醒：這仍是樣本內結果，還沒有 walk-forward，先小額或紙上跑一段再說。</a:t>
             </a:r>
           </a:p>
           <a:p>
@@ -1408,17 +1408,17 @@
           </a:p>
           <a:p>
             <a:r>
-              <a:t>同樣的策略骨架、同樣的成本假設，v1.0 換到 v1.1 唯一的差別就是「選股變強了」——評分從 legacy 換成 zscore，池子放大、再加上營收因子。結果是總報酬從 +207.9% 變成 +762.4%，將近 3.7 倍。這就是「選股很重要」。</a:t>
-            </a:r>
-          </a:p>
-          <a:p>
-            <a:r>
-              <a:t>但同一張表右邊兩欄請一起看：最大回撤從 −36.0% 變成 −53.7%，深了將近 18 個百分點；夏普只從 0.69 升到 0.95，還是輸給 0050 的 1.06。換句話說，你拿到的不是「更穩的報酬」，而是「更刺激的報酬」。</a:t>
-            </a:r>
-          </a:p>
-          <a:p>
-            <a:r>
-              <a:t>所以最後這句要講清楚：風險與獲利之間怎麼取捨，是使用者自己的決定，不是策略作者能替你決定的。保守的人留在 current（+411.1%、回撤 −52.4%），想追報酬的切 revenue 或 aggressive，但請先想清楚「−53.7% 的時候你抱不抱得住」。</a:t>
+              <a:t>同樣的策略骨架、同樣的成本假設，v1.0 換到 v1.1 唯一的差別就是「選股變強了」——評分從 legacy 換成 zscore，池子放大、再加上營收因子與產業上限。結果是總報酬從 +207.9% 變成 +1323.6%，大約 6.4 倍。這就是「選股很重要」。</a:t>
+            </a:r>
+          </a:p>
+          <a:p>
+            <a:r>
+              <a:t>但同一張表右邊兩欄請一起看：最大回撤從 −36.0% 變成 −40.2%，深了 4 個百分點；夏普從 0.69 升到 1.15，還是輸給 0050 的 1.06。換句話說，你拿到的不是「更穩的報酬」，而是「更刺激的報酬」。</a:t>
+            </a:r>
+          </a:p>
+          <a:p>
+            <a:r>
+              <a:t>所以最後這句要講清楚：風險與獲利之間怎麼取捨，是使用者自己的決定，不是策略作者能替你決定的。保守的人留在 current（+411.1%、回撤 −52.4%），想追報酬的切 revenue 或 aggressive，但請先想清楚「−40.2%、而且 2022 年單年 −29.1% 的時候，你抱不抱得住」。</a:t>
             </a:r>
           </a:p>
           <a:p/>
@@ -2062,7 +2062,7 @@
           </a:p>
           <a:p>
             <a:r>
-              <a:t>legacy 閒置資金是 +61.4%，zscore 是 +129.4%，一倍多。若把閒置資金停泊 0050，legacy +207.9%、zscore +762.4%——差距被放大了，因為停泊讓資金全程都在市場裡。</a:t>
+              <a:t>legacy 閒置資金是 +61.4%，zscore 是 +129.4%，一倍多。若把閒置資金停泊 0050，legacy +207.9%、zscore＋aggressive 是 +1323.6%——差距被放大了，因為停泊讓資金全程都在市場裡。</a:t>
             </a:r>
           </a:p>
           <a:p>
@@ -2073,7 +2073,7 @@
           <a:p/>
           <a:p>
             <a:r>
-              <a:t>【講師提示】這一頁只需要學員記住兩個數字：+207.9% → +762.4%（停泊口徑）。</a:t>
+              <a:t>【講師提示】這一頁只需要學員記住兩個數字：+207.9% → +1323.6%（停泊口徑）；但下一頁會看到代價。</a:t>
             </a:r>
           </a:p>
         </p:txBody>
@@ -2149,12 +2149,12 @@
           <a:p/>
           <a:p>
             <a:r>
-              <a:t>v1.1 把選股口徑做成三個選項，預設是中間那個 revenue。</a:t>
-            </a:r>
-          </a:p>
-          <a:p>
-            <a:r>
-              <a:t>current 是舊行為，報酬 +411.1%，還是輸 0050。revenue 是預設：池 100 加營收因子，總報酬 +762.4% 首次超過 0050，但回撤 −53.7% 是三個裡最深的，夏普 0.95 還是低於 1.06。aggressive 是池 150 加營收加產業上限，報酬 +1323.6%、回撤 −40.2%、夏普 1.15——夏普首次超過 0050。</a:t>
+              <a:t>v1.1 把選股口徑做成三個選項，預設是最右邊的 aggressive（2026-10-30 使用者裁定）。</a:t>
+            </a:r>
+          </a:p>
+          <a:p>
+            <a:r>
+              <a:t>current 是舊行為，報酬 +411.1%，還是輸 0050。revenue 是中等：池 100 加營收因子，總報酬 +762.4% 首次超過 0050，但回撤 −53.7% 是三個裡最深的，夏普 0.95 還是低於 1.06。aggressive 是池 150 加營收加產業上限，報酬 +1323.6%、回撤 −40.2%、夏普 1.15——夏普首次超過 0050。</a:t>
             </a:r>
           </a:p>
           <a:p>
@@ -14063,7 +14063,7 @@
                             <a:srgbClr val="1F242B"/>
                           </a:solidFill>
                         </a:rPr>
-                        <a:t>150 檔＋產業上限 2</a:t>
+                        <a:t>150 檔＋產業上限 2（＝預設）</a:t>
                       </a:r>
                     </a:p>
                   </a:txBody>
@@ -14425,7 +14425,7 @@
                             <a:srgbClr val="1F242B"/>
                           </a:solidFill>
                         </a:rPr>
-                        <a:t>預設 −53.7%（0050 −34.0%）</a:t>
+                        <a:t>預設 −40.2%（0050 −34.0%）</a:t>
                       </a:r>
                     </a:p>
                   </a:txBody>
@@ -14463,7 +14463,7 @@
                             <a:srgbClr val="1F242B"/>
                           </a:solidFill>
                         </a:rPr>
-                        <a:t>風險調整沒贏</a:t>
+                        <a:t>近期沒有優勢</a:t>
                       </a:r>
                     </a:p>
                   </a:txBody>
@@ -14485,7 +14485,7 @@
                             <a:srgbClr val="1F242B"/>
                           </a:solidFill>
                         </a:rPr>
-                        <a:t>夏普 0.95（0050 1.06）</a:t>
+                        <a:t>2022-2026-10：+227.8% vs 0050 +231.4%、夏普 1.05 vs 1.21</a:t>
                       </a:r>
                     </a:p>
                   </a:txBody>
@@ -14507,7 +14507,7 @@
                             <a:srgbClr val="1F242B"/>
                           </a:solidFill>
                         </a:rPr>
-                        <a:t>只有 aggressive 的 1.15 超過，但它是事後挑的</a:t>
+                        <a:t>優勢集中在 2016-2021，近年輸或打平</a:t>
                       </a:r>
                     </a:p>
                   </a:txBody>
@@ -16569,7 +16569,7 @@
                             <a:srgbClr val="1F242B"/>
                           </a:solidFill>
                         </a:rPr>
-                        <a:t>+348.2%（程式 zscore 同口徑 +762.4%）</a:t>
+                        <a:t>+348.2%（程式 zscore 同口徑 +407.1%）</a:t>
                       </a:r>
                     </a:p>
                   </a:txBody>
@@ -16993,7 +16993,7 @@
                             <a:srgbClr val="1F242B"/>
                           </a:solidFill>
                         </a:rPr>
-                        <a:t>產業上限尚未定調</a:t>
+                        <a:t>預設口徑尚未實盤驗證</a:t>
                       </a:r>
                     </a:p>
                   </a:txBody>
@@ -17015,7 +17015,7 @@
                             <a:srgbClr val="1F242B"/>
                           </a:solidFill>
                         </a:rPr>
-                        <a:t>已接進實盤（SELFSELECT_MAX_PER_SECTOR／preset aggressive 會開），待決定預設值＋實測驗證</a:t>
+                        <a:t>aggressive 已在 1.1.5 成為預設；需要實盤跑一輪並比對回測預期</a:t>
                       </a:r>
                     </a:p>
                   </a:txBody>
@@ -17037,7 +17037,7 @@
                             <a:srgbClr val="1F242B"/>
                           </a:solidFill>
                         </a:rPr>
-                        <a:t>回撤可壓低（池150：−54.9%→−40.2%）</a:t>
+                        <a:t>確認實盤能複製 +1323.6%／−40.2% 的量級</a:t>
                       </a:r>
                     </a:p>
                   </a:txBody>
@@ -17920,7 +17920,7 @@
                   <a:srgbClr val="1F242B"/>
                 </a:solidFill>
               </a:rPr>
-              <a:t>• 三個數字：+762.4%（0050 +477.6%）／回撤 −53.7%（−34.0%）／夏普 0.95（1.06）</a:t>
+              <a:t>• 三個數字：+1323.6%（0050 +477.6%）／回撤 −40.2%（−34.0%）／夏普 1.15（1.06）</a:t>
             </a:r>
           </a:p>
           <a:p>
@@ -17935,7 +17935,7 @@
                   <a:srgbClr val="1F242B"/>
                 </a:solidFill>
               </a:rPr>
-              <a:t>• 兩個動作：想回舊行為 SELFSELECT_PRESET=current；想試 AI 選股 SELFSELECT_AI=1 跑五步流程</a:t>
+              <a:t>• 兩個動作：想保守一點 SELFSELECT_PRESET=revenue／current；想試 AI 選股 SELFSELECT_AI=1 跑五步流程</a:t>
             </a:r>
           </a:p>
           <a:p>
@@ -18268,7 +18268,7 @@
                             <a:srgbClr val="1F242B"/>
                           </a:solidFill>
                         </a:rPr>
-                        <a:t>v1.1：zscore＋池 100＋營收因子（預設）</a:t>
+                        <a:t>v1.1：zscore＋池 150＋營收＋產業上限（預設 aggressive）</a:t>
                       </a:r>
                     </a:p>
                   </a:txBody>
@@ -18290,7 +18290,7 @@
                             <a:srgbClr val="1F242B"/>
                           </a:solidFill>
                         </a:rPr>
-                        <a:t>+762.4%</a:t>
+                        <a:t>+1323.6%</a:t>
                       </a:r>
                     </a:p>
                   </a:txBody>
@@ -18312,7 +18312,7 @@
                             <a:srgbClr val="1F242B"/>
                           </a:solidFill>
                         </a:rPr>
-                        <a:t>−53.7%</a:t>
+                        <a:t>−40.2%</a:t>
                       </a:r>
                     </a:p>
                   </a:txBody>
@@ -18334,7 +18334,7 @@
                             <a:srgbClr val="1F242B"/>
                           </a:solidFill>
                         </a:rPr>
-                        <a:t>0.95</a:t>
+                        <a:t>1.15</a:t>
                       </a:r>
                     </a:p>
                   </a:txBody>
@@ -18376,7 +18376,7 @@
                             <a:srgbClr val="1F242B"/>
                           </a:solidFill>
                         </a:rPr>
-                        <a:t>+554.5 pp（約 3.7 倍）</a:t>
+                        <a:t>+1115.7 pp（約 6.4 倍）</a:t>
                       </a:r>
                     </a:p>
                   </a:txBody>
@@ -18394,7 +18394,7 @@
                             <a:srgbClr val="1F242B"/>
                           </a:solidFill>
                         </a:rPr>
-                        <a:t>回撤深 17.7 pp</a:t>
+                        <a:t>回撤深 4.2 pp</a:t>
                       </a:r>
                     </a:p>
                   </a:txBody>
@@ -18412,7 +18412,7 @@
                             <a:srgbClr val="1F242B"/>
                           </a:solidFill>
                         </a:rPr>
-                        <a:t>+0.26</a:t>
+                        <a:t>+0.46</a:t>
                       </a:r>
                     </a:p>
                   </a:txBody>
@@ -18548,8 +18548,8 @@
                   <a:srgbClr val="1F242B"/>
                 </a:solidFill>
               </a:rPr>
-              <a:t>選股很重要：同樣的策略，v1.1 把選股加強後獲利大增（+207.9% → +762.4%）；但風險也一起放大（回撤 −36.0% → −53.7%）。
-要不要換？這是你的決定：保守留 current、追報酬切 revenue／aggressive——沒有免費的午餐。</a:t>
+              <a:t>選股很重要：同樣的策略，v1.1 把選股加強後獲利大增（+207.9% → +1323.6%）；但風險也一起放大（回撤 −36.0% → −40.2%）。
+要不要換？這是你的決定：想保守就切 revenue（+762.4%）或 current（+411.1%）；預設 aggressive 換到報酬，也換到 2022 年那種 −29% 的年度——沒有免費的午餐。</a:t>
             </a:r>
           </a:p>
         </p:txBody>
@@ -18587,7 +18587,7 @@
                   <a:srgbClr val="C0392B"/>
                 </a:solidFill>
               </a:rPr>
-              <a:t>• 先問自己一句：帳戶從 100 萬掉到 46 萬時，你抱不抱得住？抱不住就不要選高回撤的口徑</a:t>
+              <a:t>• 先問自己一句：帳戶從 100 萬掉到 60 萬、而且單年 −29% 時，你抱不抱得住？抱不住就切回 revenue／current</a:t>
             </a:r>
           </a:p>
           <a:p>
@@ -19088,7 +19088,7 @@
                             <a:srgbClr val="1F242B"/>
                           </a:solidFill>
                         </a:rPr>
-                        <a:t>zscore·停泊 0050 ＝ +762.4%（含營收因子）</a:t>
+                        <a:t>zscore＋池150＋營收＋產業上限 2 ＝ +1323.6%</a:t>
                       </a:r>
                     </a:p>
                   </a:txBody>
@@ -20694,7 +20694,7 @@
                             <a:srgbClr val="1F242B"/>
                           </a:solidFill>
                         </a:rPr>
-                        <a:t>revenue</a:t>
+                        <a:t>aggressive</a:t>
                       </a:r>
                     </a:p>
                   </a:txBody>
@@ -20716,7 +20716,7 @@
                             <a:srgbClr val="1F242B"/>
                           </a:solidFill>
                         </a:rPr>
-                        <a:t>總開關：current／revenue（池100＋營收）／aggressive（池150＋營收＋產業上限2）</a:t>
+                        <a:t>總開關：aggressive（池150＋營收＋產業上限2＝預設）／revenue（池100＋營收）／current（舊行為）</a:t>
                       </a:r>
                     </a:p>
                   </a:txBody>
@@ -20758,7 +20758,7 @@
                             <a:srgbClr val="1F242B"/>
                           </a:solidFill>
                         </a:rPr>
-                        <a:t>100</a:t>
+                        <a:t>150</a:t>
                       </a:r>
                     </a:p>
                   </a:txBody>
@@ -20882,7 +20882,7 @@
                             <a:srgbClr val="1F242B"/>
                           </a:solidFill>
                         </a:rPr>
-                        <a:t>0</a:t>
+                        <a:t>2</a:t>
                       </a:r>
                     </a:p>
                   </a:txBody>
@@ -20900,7 +20900,7 @@
                             <a:srgbClr val="1F242B"/>
                           </a:solidFill>
                         </a:rPr>
-                        <a:t>每產業最多幾檔；只有在池 150 實測有效</a:t>
+                        <a:t>每產業最多幾檔；aggressive 預設開 2（把回撤從 −54.9% 壓到 −40.2%）</a:t>
                       </a:r>
                     </a:p>
                   </a:txBody>
@@ -21389,7 +21389,7 @@
                             <a:srgbClr val="1F242B"/>
                           </a:solidFill>
                         </a:rPr>
-                        <a:t>各池大小都是正貢獻；池 100 從 +411.1% → +762.4%</a:t>
+                        <a:t>各池大小都是正貢獻；池 100 從 +411.1% → +762.4%、池 150 從 +541.7% → +940.9%</a:t>
                       </a:r>
                     </a:p>
                   </a:txBody>
@@ -22315,7 +22315,7 @@
                             <a:srgbClr val="1F242B"/>
                           </a:solidFill>
                         </a:rPr>
-                        <a:t>zscore·停泊 0050（＝現行預設口徑）</a:t>
+                        <a:t>zscore＋池150＋營收＋上限2（＝現行預設）</a:t>
                       </a:r>
                     </a:p>
                   </a:txBody>
@@ -22337,7 +22337,7 @@
                             <a:srgbClr val="1F242B"/>
                           </a:solidFill>
                         </a:rPr>
-                        <a:t>+762.4%</a:t>
+                        <a:t>+1323.6%</a:t>
                       </a:r>
                     </a:p>
                   </a:txBody>
@@ -22359,7 +22359,7 @@
                             <a:srgbClr val="1F242B"/>
                           </a:solidFill>
                         </a:rPr>
-                        <a:t>+24.1%</a:t>
+                        <a:t>+30.4%</a:t>
                       </a:r>
                     </a:p>
                   </a:txBody>
@@ -22381,7 +22381,7 @@
                             <a:srgbClr val="1F242B"/>
                           </a:solidFill>
                         </a:rPr>
-                        <a:t>−53.7%</a:t>
+                        <a:t>−40.2%</a:t>
                       </a:r>
                     </a:p>
                   </a:txBody>
@@ -22403,7 +22403,7 @@
                             <a:srgbClr val="1F242B"/>
                           </a:solidFill>
                         </a:rPr>
-                        <a:t>0.95</a:t>
+                        <a:t>1.15</a:t>
                       </a:r>
                     </a:p>
                   </a:txBody>
@@ -22916,7 +22916,7 @@
                             <a:srgbClr val="1F242B"/>
                           </a:solidFill>
                         </a:rPr>
-                        <a:t>revenue（預設）</a:t>
+                        <a:t>revenue</a:t>
                       </a:r>
                     </a:p>
                   </a:txBody>
@@ -23072,7 +23072,7 @@
                             <a:srgbClr val="1F242B"/>
                           </a:solidFill>
                         </a:rPr>
-                        <a:t>aggressive</a:t>
+                        <a:t>aggressive（預設）</a:t>
                       </a:r>
                     </a:p>
                   </a:txBody>
@@ -23410,7 +23410,7 @@
                   <a:srgbClr val="C0392B"/>
                 </a:solidFill>
               </a:rPr>
-              <a:t>• 選哪一個由你決定：預設 revenue，想回舊行為設 current，想追最高歷史報酬設 aggressive</a:t>
+              <a:t>• 預設＝aggressive；想保守一點設 revenue（+762.4%）或 current（+411.1%）</a:t>
             </a:r>
           </a:p>
         </p:txBody>
